--- a/doc/ppt/The Use of AI in Marketing.pptx
+++ b/doc/ppt/The Use of AI in Marketing.pptx
@@ -5,7 +5,7 @@
     <p:sldMasterId id="2147483704" r:id="rId1"/>
   </p:sldMasterIdLst>
   <p:notesMasterIdLst>
-    <p:notesMasterId r:id="rId29"/>
+    <p:notesMasterId r:id="rId28"/>
   </p:notesMasterIdLst>
   <p:sldIdLst>
     <p:sldId id="256" r:id="rId2"/>
@@ -26,55 +26,54 @@
     <p:sldId id="374" r:id="rId17"/>
     <p:sldId id="358" r:id="rId18"/>
     <p:sldId id="364" r:id="rId19"/>
-    <p:sldId id="376" r:id="rId20"/>
-    <p:sldId id="377" r:id="rId21"/>
-    <p:sldId id="347" r:id="rId22"/>
-    <p:sldId id="375" r:id="rId23"/>
-    <p:sldId id="348" r:id="rId24"/>
-    <p:sldId id="362" r:id="rId25"/>
-    <p:sldId id="349" r:id="rId26"/>
-    <p:sldId id="365" r:id="rId27"/>
-    <p:sldId id="366" r:id="rId28"/>
+    <p:sldId id="378" r:id="rId20"/>
+    <p:sldId id="347" r:id="rId21"/>
+    <p:sldId id="375" r:id="rId22"/>
+    <p:sldId id="348" r:id="rId23"/>
+    <p:sldId id="362" r:id="rId24"/>
+    <p:sldId id="349" r:id="rId25"/>
+    <p:sldId id="365" r:id="rId26"/>
+    <p:sldId id="366" r:id="rId27"/>
   </p:sldIdLst>
   <p:sldSz cx="9144000" cy="5143500" type="screen16x9"/>
   <p:notesSz cx="6858000" cy="9144000"/>
   <p:embeddedFontLst>
     <p:embeddedFont>
-      <p:font typeface="Orbitron Black" panose="02020500000000000000" charset="0"/>
+      <p:font typeface="微軟正黑體" panose="020B0604030504040204" pitchFamily="34" charset="-120"/>
+      <p:regular r:id="rId29"/>
       <p:bold r:id="rId30"/>
     </p:embeddedFont>
     <p:embeddedFont>
-      <p:font typeface="Darker Grotesque" panose="02020500000000000000" charset="0"/>
-      <p:regular r:id="rId31"/>
-      <p:bold r:id="rId32"/>
+      <p:font typeface="微軟正黑體" panose="020B0604030504040204" pitchFamily="34" charset="-120"/>
+      <p:regular r:id="rId29"/>
+      <p:bold r:id="rId30"/>
     </p:embeddedFont>
     <p:embeddedFont>
-      <p:font typeface="Bebas Neue" panose="02020500000000000000" charset="0"/>
+      <p:font typeface="Bebas Neue" panose="020F0502020204030204" pitchFamily="34" charset="0"/>
+      <p:regular r:id="rId31"/>
+    </p:embeddedFont>
+    <p:embeddedFont>
+      <p:font typeface="Cambria Math" panose="02040503050406030204" pitchFamily="18" charset="0"/>
+      <p:regular r:id="rId32"/>
+    </p:embeddedFont>
+    <p:embeddedFont>
+      <p:font typeface="Darker Grotesque" panose="02020500000000000000" charset="0"/>
       <p:regular r:id="rId33"/>
+      <p:bold r:id="rId34"/>
     </p:embeddedFont>
     <p:embeddedFont>
       <p:font typeface="Darker Grotesque Medium" panose="02020500000000000000" charset="0"/>
-      <p:regular r:id="rId34"/>
-      <p:bold r:id="rId35"/>
-    </p:embeddedFont>
-    <p:embeddedFont>
-      <p:font typeface="Microsoft JhengHei" panose="020B0604030504040204" pitchFamily="34" charset="-120"/>
-      <p:regular r:id="rId36"/>
-      <p:bold r:id="rId37"/>
+      <p:regular r:id="rId35"/>
+      <p:bold r:id="rId36"/>
     </p:embeddedFont>
     <p:embeddedFont>
       <p:font typeface="Orbitron" panose="02020500000000000000" charset="0"/>
-      <p:regular r:id="rId38"/>
-      <p:bold r:id="rId39"/>
+      <p:regular r:id="rId37"/>
+      <p:bold r:id="rId38"/>
     </p:embeddedFont>
     <p:embeddedFont>
-      <p:font typeface="Cambria Math" panose="02040503050406030204" pitchFamily="18" charset="0"/>
-      <p:regular r:id="rId40"/>
-    </p:embeddedFont>
-    <p:embeddedFont>
-      <p:font typeface="Microsoft JhengHei" panose="020B0604030504040204" pitchFamily="34" charset="-120"/>
-      <p:regular r:id="rId36"/>
-      <p:bold r:id="rId37"/>
+      <p:font typeface="Orbitron Black" panose="02020500000000000000" charset="0"/>
+      <p:bold r:id="rId39"/>
     </p:embeddedFont>
   </p:embeddedFontLst>
   <p:defaultTextStyle>
@@ -1687,101 +1686,101 @@
           <a:lstStyle/>
           <a:p>
             <a:r>
-              <a:rPr lang="en-US" altLang="zh-TW" b="1" dirty="0" err="1" smtClean="0"/>
+              <a:rPr lang="en-US" altLang="zh-TW" b="1" dirty="0" err="1"/>
               <a:t>WebSocket</a:t>
             </a:r>
             <a:r>
-              <a:rPr lang="en-US" altLang="zh-TW" b="1" dirty="0" smtClean="0"/>
+              <a:rPr lang="en-US" altLang="zh-TW" b="1" dirty="0"/>
               <a:t> Channel</a:t>
             </a:r>
             <a:r>
-              <a:rPr lang="zh-TW" altLang="en-US" dirty="0" smtClean="0"/>
+              <a:rPr lang="zh-TW" altLang="en-US" dirty="0"/>
               <a:t>：即時將情緒 </a:t>
             </a:r>
             <a:r>
-              <a:rPr lang="en-US" altLang="zh-TW" dirty="0" smtClean="0"/>
+              <a:rPr lang="en-US" altLang="zh-TW" dirty="0"/>
               <a:t>&amp; </a:t>
             </a:r>
             <a:r>
-              <a:rPr lang="zh-TW" altLang="en-US" dirty="0" smtClean="0"/>
+              <a:rPr lang="zh-TW" altLang="en-US" dirty="0"/>
               <a:t>價格指標推送至 </a:t>
             </a:r>
             <a:r>
-              <a:rPr lang="en-US" altLang="zh-TW" dirty="0" smtClean="0"/>
+              <a:rPr lang="en-US" altLang="zh-TW" dirty="0"/>
               <a:t>React</a:t>
             </a:r>
             <a:r>
-              <a:rPr lang="zh-TW" altLang="en-US" dirty="0" smtClean="0"/>
+              <a:rPr lang="zh-TW" altLang="en-US" dirty="0"/>
               <a:t>。</a:t>
             </a:r>
           </a:p>
           <a:p>
             <a:r>
-              <a:rPr lang="en-US" altLang="zh-TW" b="1" dirty="0" err="1" smtClean="0"/>
+              <a:rPr lang="en-US" altLang="zh-TW" b="1" dirty="0" err="1"/>
               <a:t>TimescaleDB</a:t>
             </a:r>
             <a:r>
-              <a:rPr lang="zh-TW" altLang="en-US" dirty="0" smtClean="0"/>
+              <a:rPr lang="zh-TW" altLang="en-US" dirty="0"/>
               <a:t>：優化時序查詢、</a:t>
             </a:r>
             <a:r>
-              <a:rPr lang="en-US" altLang="zh-TW" dirty="0" smtClean="0"/>
+              <a:rPr lang="en-US" altLang="zh-TW" dirty="0"/>
               <a:t>Down-sampling</a:t>
             </a:r>
             <a:r>
-              <a:rPr lang="zh-TW" altLang="en-US" dirty="0" smtClean="0"/>
+              <a:rPr lang="zh-TW" altLang="en-US" dirty="0"/>
               <a:t>。</a:t>
             </a:r>
           </a:p>
           <a:p>
             <a:r>
-              <a:rPr lang="en-US" altLang="zh-TW" b="1" dirty="0" smtClean="0"/>
+              <a:rPr lang="en-US" altLang="zh-TW" b="1" dirty="0"/>
               <a:t>Python ML Worker</a:t>
             </a:r>
             <a:r>
-              <a:rPr lang="zh-TW" altLang="en-US" dirty="0" smtClean="0"/>
+              <a:rPr lang="zh-TW" altLang="en-US" dirty="0"/>
               <a:t>：</a:t>
             </a:r>
             <a:r>
-              <a:rPr lang="en-US" altLang="zh-TW" dirty="0" smtClean="0"/>
+              <a:rPr lang="en-US" altLang="zh-TW" dirty="0"/>
               <a:t>BERT / UASTL </a:t>
             </a:r>
             <a:r>
-              <a:rPr lang="zh-TW" altLang="en-US" dirty="0" smtClean="0"/>
+              <a:rPr lang="zh-TW" altLang="en-US" dirty="0"/>
               <a:t>批次 </a:t>
             </a:r>
             <a:r>
-              <a:rPr lang="en-US" altLang="zh-TW" dirty="0" smtClean="0"/>
+              <a:rPr lang="en-US" altLang="zh-TW" dirty="0"/>
               <a:t>&amp; </a:t>
             </a:r>
             <a:r>
-              <a:rPr lang="zh-TW" altLang="en-US" dirty="0" smtClean="0"/>
+              <a:rPr lang="zh-TW" altLang="en-US" dirty="0"/>
               <a:t>線上推論；</a:t>
             </a:r>
             <a:r>
-              <a:rPr lang="en-US" altLang="zh-TW" dirty="0" smtClean="0"/>
+              <a:rPr lang="en-US" altLang="zh-TW" dirty="0"/>
               <a:t>Kafka Bus </a:t>
             </a:r>
             <a:r>
-              <a:rPr lang="zh-TW" altLang="en-US" dirty="0" smtClean="0"/>
+              <a:rPr lang="zh-TW" altLang="en-US" dirty="0"/>
               <a:t>解耦寫入流程。</a:t>
             </a:r>
           </a:p>
           <a:p>
             <a:r>
-              <a:rPr lang="en-US" altLang="zh-TW" b="1" dirty="0" smtClean="0"/>
+              <a:rPr lang="en-US" altLang="zh-TW" b="1" dirty="0"/>
               <a:t>Service Worker + HTTP Cache</a:t>
             </a:r>
             <a:r>
-              <a:rPr lang="zh-TW" altLang="en-US" dirty="0" smtClean="0"/>
+              <a:rPr lang="zh-TW" altLang="en-US" dirty="0"/>
               <a:t>：前端離線瀏覽、漸進式 </a:t>
             </a:r>
             <a:r>
-              <a:rPr lang="en-US" altLang="zh-TW" dirty="0" smtClean="0"/>
+              <a:rPr lang="en-US" altLang="zh-TW" dirty="0"/>
               <a:t>Web App</a:t>
             </a:r>
             <a:r>
-              <a:rPr lang="zh-TW" altLang="en-US" dirty="0" smtClean="0"/>
+              <a:rPr lang="zh-TW" altLang="en-US" dirty="0"/>
               <a:t>。</a:t>
             </a:r>
           </a:p>
@@ -1795,7 +1794,7 @@
               </a:spcAft>
               <a:buNone/>
             </a:pPr>
-            <a:endParaRPr lang="en-US" dirty="0" smtClean="0"/>
+            <a:endParaRPr lang="en-US" dirty="0"/>
           </a:p>
           <a:p>
             <a:pPr marL="0" lvl="0" indent="0" algn="l" rtl="0">
@@ -1807,7 +1806,7 @@
               </a:spcAft>
               <a:buNone/>
             </a:pPr>
-            <a:endParaRPr lang="en-US" dirty="0" smtClean="0"/>
+            <a:endParaRPr lang="en-US" dirty="0"/>
           </a:p>
           <a:p>
             <a:pPr marL="0" lvl="0" indent="0" algn="l" rtl="0">
@@ -1820,7 +1819,7 @@
               <a:buNone/>
             </a:pPr>
             <a:r>
-              <a:rPr lang="en-US" dirty="0" smtClean="0"/>
+              <a:rPr lang="en-US" dirty="0"/>
               <a:t>User Browser</a:t>
             </a:r>
           </a:p>
@@ -1835,7 +1834,7 @@
               <a:buNone/>
             </a:pPr>
             <a:r>
-              <a:rPr lang="en-US" dirty="0" smtClean="0"/>
+              <a:rPr lang="en-US" dirty="0"/>
               <a:t>   │</a:t>
             </a:r>
           </a:p>
@@ -1850,7 +1849,7 @@
               <a:buNone/>
             </a:pPr>
             <a:r>
-              <a:rPr lang="en-US" dirty="0" smtClean="0"/>
+              <a:rPr lang="en-US" dirty="0"/>
               <a:t>   ▼</a:t>
             </a:r>
           </a:p>
@@ -1865,7 +1864,7 @@
               <a:buNone/>
             </a:pPr>
             <a:r>
-              <a:rPr lang="en-US" dirty="0" smtClean="0"/>
+              <a:rPr lang="en-US" dirty="0"/>
               <a:t>React SPA (frontend)</a:t>
             </a:r>
           </a:p>
@@ -1880,7 +1879,7 @@
               <a:buNone/>
             </a:pPr>
             <a:r>
-              <a:rPr lang="en-US" dirty="0" smtClean="0"/>
+              <a:rPr lang="en-US" dirty="0"/>
               <a:t>   ├─→  Express.js API (backend)</a:t>
             </a:r>
           </a:p>
@@ -1895,7 +1894,7 @@
               <a:buNone/>
             </a:pPr>
             <a:r>
-              <a:rPr lang="en-US" dirty="0" smtClean="0"/>
+              <a:rPr lang="en-US" dirty="0"/>
               <a:t>   │       ├─→ Security Middleware</a:t>
             </a:r>
           </a:p>
@@ -1910,7 +1909,7 @@
               <a:buNone/>
             </a:pPr>
             <a:r>
-              <a:rPr lang="en-US" dirty="0" smtClean="0"/>
+              <a:rPr lang="en-US" dirty="0"/>
               <a:t>   │       ├─→ SQLite Database</a:t>
             </a:r>
           </a:p>
@@ -1925,7 +1924,7 @@
               <a:buNone/>
             </a:pPr>
             <a:r>
-              <a:rPr lang="en-US" dirty="0" smtClean="0"/>
+              <a:rPr lang="en-US" dirty="0"/>
               <a:t>   │       └─→ Index Optimizer Script</a:t>
             </a:r>
           </a:p>
@@ -1940,7 +1939,7 @@
               <a:buNone/>
             </a:pPr>
             <a:r>
-              <a:rPr lang="en-US" dirty="0" smtClean="0"/>
+              <a:rPr lang="en-US" dirty="0"/>
               <a:t>   └─→  Service Worker ─→ HTTP Cache</a:t>
             </a:r>
           </a:p>
@@ -1954,109 +1953,109 @@
               </a:spcAft>
               <a:buNone/>
             </a:pPr>
-            <a:endParaRPr lang="en-US" dirty="0" smtClean="0"/>
+            <a:endParaRPr lang="en-US" dirty="0"/>
           </a:p>
           <a:p>
             <a:r>
-              <a:rPr lang="zh-TW" altLang="en-US" b="1" dirty="0" smtClean="0"/>
+              <a:rPr lang="zh-TW" altLang="en-US" b="1" dirty="0"/>
               <a:t>雙支線</a:t>
             </a:r>
             <a:r>
-              <a:rPr lang="zh-TW" altLang="en-US" dirty="0" smtClean="0"/>
+              <a:rPr lang="zh-TW" altLang="en-US" dirty="0"/>
               <a:t>：</a:t>
             </a:r>
           </a:p>
           <a:p>
             <a:r>
-              <a:rPr lang="zh-TW" altLang="en-US" dirty="0" smtClean="0"/>
+              <a:rPr lang="zh-TW" altLang="en-US" dirty="0"/>
               <a:t>主線：</a:t>
             </a:r>
             <a:r>
-              <a:rPr lang="en-US" altLang="zh-TW" dirty="0" smtClean="0"/>
+              <a:rPr lang="en-US" altLang="zh-TW" dirty="0"/>
               <a:t>Browser → SPA → API → DB / Middleware / Index Job</a:t>
             </a:r>
           </a:p>
           <a:p>
             <a:r>
-              <a:rPr lang="zh-TW" altLang="en-US" dirty="0" smtClean="0"/>
+              <a:rPr lang="zh-TW" altLang="en-US" dirty="0"/>
               <a:t>快取線：</a:t>
             </a:r>
             <a:r>
-              <a:rPr lang="en-US" altLang="zh-TW" dirty="0" smtClean="0"/>
+              <a:rPr lang="en-US" altLang="zh-TW" dirty="0"/>
               <a:t>SPA ↔ Service Worker ↔ HTTP Cache</a:t>
             </a:r>
             <a:r>
-              <a:rPr lang="zh-TW" altLang="en-US" dirty="0" smtClean="0"/>
+              <a:rPr lang="zh-TW" altLang="en-US" dirty="0"/>
               <a:t>（離線與資源加速）</a:t>
             </a:r>
           </a:p>
           <a:p>
             <a:r>
-              <a:rPr lang="zh-TW" altLang="en-US" b="1" dirty="0" smtClean="0"/>
+              <a:rPr lang="zh-TW" altLang="en-US" b="1" dirty="0"/>
               <a:t>資料庫</a:t>
             </a:r>
             <a:r>
-              <a:rPr lang="zh-TW" altLang="en-US" dirty="0" smtClean="0"/>
+              <a:rPr lang="zh-TW" altLang="en-US" dirty="0"/>
               <a:t>：選擇 </a:t>
             </a:r>
             <a:r>
-              <a:rPr lang="en-US" altLang="zh-TW" b="1" dirty="0" smtClean="0"/>
+              <a:rPr lang="en-US" altLang="zh-TW" b="1" dirty="0"/>
               <a:t>SQLite</a:t>
             </a:r>
             <a:r>
-              <a:rPr lang="zh-TW" altLang="en-US" dirty="0" smtClean="0"/>
+              <a:rPr lang="zh-TW" altLang="en-US" dirty="0"/>
               <a:t>（輕量、易部署）。</a:t>
             </a:r>
           </a:p>
           <a:p>
             <a:r>
-              <a:rPr lang="zh-TW" altLang="en-US" b="1" dirty="0" smtClean="0"/>
+              <a:rPr lang="zh-TW" altLang="en-US" b="1" dirty="0"/>
               <a:t>批次腳本</a:t>
             </a:r>
             <a:r>
-              <a:rPr lang="zh-TW" altLang="en-US" dirty="0" smtClean="0"/>
+              <a:rPr lang="zh-TW" altLang="en-US" dirty="0"/>
               <a:t>：</a:t>
             </a:r>
             <a:r>
-              <a:rPr lang="en-US" altLang="zh-TW" dirty="0" smtClean="0"/>
+              <a:rPr lang="en-US" altLang="zh-TW" dirty="0"/>
               <a:t>Index Optimizer Script </a:t>
             </a:r>
             <a:r>
-              <a:rPr lang="zh-TW" altLang="en-US" dirty="0" smtClean="0"/>
+              <a:rPr lang="zh-TW" altLang="en-US" dirty="0"/>
               <a:t>代表離線維護工作（重建索引或匯入資料）。</a:t>
             </a:r>
           </a:p>
           <a:p>
             <a:r>
-              <a:rPr lang="zh-TW" altLang="en-US" b="1" dirty="0" smtClean="0"/>
+              <a:rPr lang="zh-TW" altLang="en-US" b="1" dirty="0"/>
               <a:t>安全</a:t>
             </a:r>
             <a:r>
-              <a:rPr lang="zh-TW" altLang="en-US" dirty="0" smtClean="0"/>
+              <a:rPr lang="zh-TW" altLang="en-US" dirty="0"/>
               <a:t>：</a:t>
             </a:r>
             <a:r>
-              <a:rPr lang="en-US" altLang="zh-TW" dirty="0" smtClean="0"/>
+              <a:rPr lang="en-US" altLang="zh-TW" dirty="0"/>
               <a:t>Security Middleware </a:t>
             </a:r>
             <a:r>
-              <a:rPr lang="zh-TW" altLang="en-US" dirty="0" smtClean="0"/>
+              <a:rPr lang="zh-TW" altLang="en-US" dirty="0"/>
               <a:t>置於 </a:t>
             </a:r>
             <a:r>
-              <a:rPr lang="en-US" altLang="zh-TW" dirty="0" smtClean="0"/>
+              <a:rPr lang="en-US" altLang="zh-TW" dirty="0"/>
               <a:t>API </a:t>
             </a:r>
             <a:r>
-              <a:rPr lang="zh-TW" altLang="en-US" dirty="0" smtClean="0"/>
+              <a:rPr lang="zh-TW" altLang="en-US" dirty="0"/>
               <a:t>之上，防範 </a:t>
             </a:r>
             <a:r>
-              <a:rPr lang="en-US" altLang="zh-TW" dirty="0" smtClean="0"/>
+              <a:rPr lang="en-US" altLang="zh-TW" dirty="0"/>
               <a:t>XSS/CORS/Rate-Limit</a:t>
             </a:r>
             <a:r>
-              <a:rPr lang="zh-TW" altLang="en-US" dirty="0" smtClean="0"/>
+              <a:rPr lang="zh-TW" altLang="en-US" dirty="0"/>
               <a:t>。</a:t>
             </a:r>
           </a:p>
@@ -2349,7 +2348,7 @@
         <p:cNvPr id="1" name="Shape 790">
           <a:extLst>
             <a:ext uri="{FF2B5EF4-FFF2-40B4-BE49-F238E27FC236}">
-              <a16:creationId xmlns:a16="http://schemas.microsoft.com/office/drawing/2014/main" id="{E566EB09-2DC2-4671-7637-7E0AC86AC19C}"/>
+              <a16:creationId xmlns:a16="http://schemas.microsoft.com/office/drawing/2014/main" id="{FC90F3B3-C633-BCC6-3EBD-4FB61E918985}"/>
             </a:ext>
           </a:extLst>
         </p:cNvPr>
@@ -2369,7 +2368,7 @@
           <p:cNvPr id="791" name="Google Shape;791;gd55b463498_4_293:notes">
             <a:extLst>
               <a:ext uri="{FF2B5EF4-FFF2-40B4-BE49-F238E27FC236}">
-                <a16:creationId xmlns:a16="http://schemas.microsoft.com/office/drawing/2014/main" id="{CBB29C12-0E43-7C0E-F473-9011FEF6A1B4}"/>
+                <a16:creationId xmlns:a16="http://schemas.microsoft.com/office/drawing/2014/main" id="{E559D1C6-C0A5-A7A2-1D5A-E74D8A05062B}"/>
               </a:ext>
             </a:extLst>
           </p:cNvPr>
@@ -2416,7 +2415,7 @@
           <p:cNvPr id="792" name="Google Shape;792;gd55b463498_4_293:notes">
             <a:extLst>
               <a:ext uri="{FF2B5EF4-FFF2-40B4-BE49-F238E27FC236}">
-                <a16:creationId xmlns:a16="http://schemas.microsoft.com/office/drawing/2014/main" id="{2FBCEF2B-91D4-6319-02EF-F207EC58FDD6}"/>
+                <a16:creationId xmlns:a16="http://schemas.microsoft.com/office/drawing/2014/main" id="{D44E37D9-9FE5-41DC-0056-15A7DA34534D}"/>
               </a:ext>
             </a:extLst>
           </p:cNvPr>
@@ -2458,7 +2457,7 @@
     </p:spTree>
     <p:extLst>
       <p:ext uri="{BB962C8B-B14F-4D97-AF65-F5344CB8AC3E}">
-        <p14:creationId xmlns:p14="http://schemas.microsoft.com/office/powerpoint/2010/main" val="29692120"/>
+        <p14:creationId xmlns:p14="http://schemas.microsoft.com/office/powerpoint/2010/main" val="1103336889"/>
       </p:ext>
     </p:extLst>
   </p:cSld>
@@ -2573,133 +2572,6 @@
 </file>
 
 <file path=ppt/notesSlides/notesSlide20.xml><?xml version="1.0" encoding="utf-8"?>
-<p:notes xmlns:a="http://schemas.openxmlformats.org/drawingml/2006/main" xmlns:r="http://schemas.openxmlformats.org/officeDocument/2006/relationships" xmlns:p="http://schemas.openxmlformats.org/presentationml/2006/main" showMasterSp="0" showMasterPhAnim="0">
-  <p:cSld>
-    <p:spTree>
-      <p:nvGrpSpPr>
-        <p:cNvPr id="1" name="Shape 790">
-          <a:extLst>
-            <a:ext uri="{FF2B5EF4-FFF2-40B4-BE49-F238E27FC236}">
-              <a16:creationId xmlns:a16="http://schemas.microsoft.com/office/drawing/2014/main" id="{E566EB09-2DC2-4671-7637-7E0AC86AC19C}"/>
-            </a:ext>
-          </a:extLst>
-        </p:cNvPr>
-        <p:cNvGrpSpPr/>
-        <p:nvPr/>
-      </p:nvGrpSpPr>
-      <p:grpSpPr>
-        <a:xfrm>
-          <a:off x="0" y="0"/>
-          <a:ext cx="0" cy="0"/>
-          <a:chOff x="0" y="0"/>
-          <a:chExt cx="0" cy="0"/>
-        </a:xfrm>
-      </p:grpSpPr>
-      <p:sp>
-        <p:nvSpPr>
-          <p:cNvPr id="791" name="Google Shape;791;gd55b463498_4_293:notes">
-            <a:extLst>
-              <a:ext uri="{FF2B5EF4-FFF2-40B4-BE49-F238E27FC236}">
-                <a16:creationId xmlns:a16="http://schemas.microsoft.com/office/drawing/2014/main" id="{CBB29C12-0E43-7C0E-F473-9011FEF6A1B4}"/>
-              </a:ext>
-            </a:extLst>
-          </p:cNvPr>
-          <p:cNvSpPr>
-            <a:spLocks noGrp="1" noRot="1" noChangeAspect="1"/>
-          </p:cNvSpPr>
-          <p:nvPr>
-            <p:ph type="sldImg" idx="2"/>
-          </p:nvPr>
-        </p:nvSpPr>
-        <p:spPr>
-          <a:xfrm>
-            <a:off x="381000" y="685800"/>
-            <a:ext cx="6096000" cy="3429000"/>
-          </a:xfrm>
-          <a:custGeom>
-            <a:avLst/>
-            <a:gdLst/>
-            <a:ahLst/>
-            <a:cxnLst/>
-            <a:rect l="l" t="t" r="r" b="b"/>
-            <a:pathLst>
-              <a:path w="120000" h="120000" extrusionOk="0">
-                <a:moveTo>
-                  <a:pt x="0" y="0"/>
-                </a:moveTo>
-                <a:lnTo>
-                  <a:pt x="120000" y="0"/>
-                </a:lnTo>
-                <a:lnTo>
-                  <a:pt x="120000" y="120000"/>
-                </a:lnTo>
-                <a:lnTo>
-                  <a:pt x="0" y="120000"/>
-                </a:lnTo>
-                <a:close/>
-              </a:path>
-            </a:pathLst>
-          </a:custGeom>
-        </p:spPr>
-      </p:sp>
-      <p:sp>
-        <p:nvSpPr>
-          <p:cNvPr id="792" name="Google Shape;792;gd55b463498_4_293:notes">
-            <a:extLst>
-              <a:ext uri="{FF2B5EF4-FFF2-40B4-BE49-F238E27FC236}">
-                <a16:creationId xmlns:a16="http://schemas.microsoft.com/office/drawing/2014/main" id="{2FBCEF2B-91D4-6319-02EF-F207EC58FDD6}"/>
-              </a:ext>
-            </a:extLst>
-          </p:cNvPr>
-          <p:cNvSpPr txBox="1">
-            <a:spLocks noGrp="1"/>
-          </p:cNvSpPr>
-          <p:nvPr>
-            <p:ph type="body" idx="1"/>
-          </p:nvPr>
-        </p:nvSpPr>
-        <p:spPr>
-          <a:xfrm>
-            <a:off x="685800" y="4343400"/>
-            <a:ext cx="5486400" cy="4114800"/>
-          </a:xfrm>
-          <a:prstGeom prst="rect">
-            <a:avLst/>
-          </a:prstGeom>
-        </p:spPr>
-        <p:txBody>
-          <a:bodyPr spcFirstLastPara="1" wrap="square" lIns="91425" tIns="91425" rIns="91425" bIns="91425" anchor="t" anchorCtr="0">
-            <a:noAutofit/>
-          </a:bodyPr>
-          <a:lstStyle/>
-          <a:p>
-            <a:pPr marL="0" lvl="0" indent="0" algn="l" rtl="0">
-              <a:spcBef>
-                <a:spcPts val="0"/>
-              </a:spcBef>
-              <a:spcAft>
-                <a:spcPts val="0"/>
-              </a:spcAft>
-              <a:buNone/>
-            </a:pPr>
-            <a:endParaRPr dirty="0"/>
-          </a:p>
-        </p:txBody>
-      </p:sp>
-    </p:spTree>
-    <p:extLst>
-      <p:ext uri="{BB962C8B-B14F-4D97-AF65-F5344CB8AC3E}">
-        <p14:creationId xmlns:p14="http://schemas.microsoft.com/office/powerpoint/2010/main" val="3755392446"/>
-      </p:ext>
-    </p:extLst>
-  </p:cSld>
-  <p:clrMapOvr>
-    <a:masterClrMapping/>
-  </p:clrMapOvr>
-</p:notes>
-</file>
-
-<file path=ppt/notesSlides/notesSlide21.xml><?xml version="1.0" encoding="utf-8"?>
 <p:notes xmlns:a="http://schemas.openxmlformats.org/drawingml/2006/main" xmlns:r="http://schemas.openxmlformats.org/officeDocument/2006/relationships" xmlns:p="http://schemas.openxmlformats.org/presentationml/2006/main" showMasterSp="0" showMasterPhAnim="0">
   <p:cSld>
     <p:spTree>
@@ -2826,7 +2698,7 @@
 </p:notes>
 </file>
 
-<file path=ppt/notesSlides/notesSlide22.xml><?xml version="1.0" encoding="utf-8"?>
+<file path=ppt/notesSlides/notesSlide21.xml><?xml version="1.0" encoding="utf-8"?>
 <p:notes xmlns:a="http://schemas.openxmlformats.org/drawingml/2006/main" xmlns:r="http://schemas.openxmlformats.org/officeDocument/2006/relationships" xmlns:p="http://schemas.openxmlformats.org/presentationml/2006/main" showMasterSp="0" showMasterPhAnim="0">
   <p:cSld>
     <p:spTree>
@@ -2935,7 +2807,7 @@
 </p:notes>
 </file>
 
-<file path=ppt/notesSlides/notesSlide23.xml><?xml version="1.0" encoding="utf-8"?>
+<file path=ppt/notesSlides/notesSlide22.xml><?xml version="1.0" encoding="utf-8"?>
 <p:notes xmlns:a="http://schemas.openxmlformats.org/drawingml/2006/main" xmlns:r="http://schemas.openxmlformats.org/officeDocument/2006/relationships" xmlns:p="http://schemas.openxmlformats.org/presentationml/2006/main" showMasterSp="0" showMasterPhAnim="0">
   <p:cSld>
     <p:spTree>
@@ -3062,7 +2934,7 @@
 </p:notes>
 </file>
 
-<file path=ppt/notesSlides/notesSlide24.xml><?xml version="1.0" encoding="utf-8"?>
+<file path=ppt/notesSlides/notesSlide23.xml><?xml version="1.0" encoding="utf-8"?>
 <p:notes xmlns:a="http://schemas.openxmlformats.org/drawingml/2006/main" xmlns:r="http://schemas.openxmlformats.org/officeDocument/2006/relationships" xmlns:p="http://schemas.openxmlformats.org/presentationml/2006/main" showMasterSp="0" showMasterPhAnim="0">
   <p:cSld>
     <p:spTree>
@@ -3189,7 +3061,7 @@
 </p:notes>
 </file>
 
-<file path=ppt/notesSlides/notesSlide25.xml><?xml version="1.0" encoding="utf-8"?>
+<file path=ppt/notesSlides/notesSlide24.xml><?xml version="1.0" encoding="utf-8"?>
 <p:notes xmlns:a="http://schemas.openxmlformats.org/drawingml/2006/main" xmlns:r="http://schemas.openxmlformats.org/officeDocument/2006/relationships" xmlns:p="http://schemas.openxmlformats.org/presentationml/2006/main" showMasterSp="0" showMasterPhAnim="0">
   <p:cSld>
     <p:spTree>
@@ -3316,7 +3188,7 @@
 </p:notes>
 </file>
 
-<file path=ppt/notesSlides/notesSlide26.xml><?xml version="1.0" encoding="utf-8"?>
+<file path=ppt/notesSlides/notesSlide25.xml><?xml version="1.0" encoding="utf-8"?>
 <p:notes xmlns:a="http://schemas.openxmlformats.org/drawingml/2006/main" xmlns:r="http://schemas.openxmlformats.org/officeDocument/2006/relationships" xmlns:p="http://schemas.openxmlformats.org/presentationml/2006/main" showMasterSp="0" showMasterPhAnim="0">
   <p:cSld>
     <p:spTree>
@@ -3443,7 +3315,7 @@
 </p:notes>
 </file>
 
-<file path=ppt/notesSlides/notesSlide27.xml><?xml version="1.0" encoding="utf-8"?>
+<file path=ppt/notesSlides/notesSlide26.xml><?xml version="1.0" encoding="utf-8"?>
 <p:notes xmlns:a="http://schemas.openxmlformats.org/drawingml/2006/main" xmlns:r="http://schemas.openxmlformats.org/officeDocument/2006/relationships" xmlns:p="http://schemas.openxmlformats.org/presentationml/2006/main" showMasterSp="0" showMasterPhAnim="0">
   <p:cSld>
     <p:spTree>
@@ -4411,134 +4283,134 @@
           <a:lstStyle/>
           <a:p>
             <a:r>
-              <a:rPr lang="zh-TW" altLang="en-US" dirty="0" smtClean="0"/>
+              <a:rPr lang="zh-TW" altLang="en-US" dirty="0"/>
               <a:t>你看到的介面（類似 </a:t>
             </a:r>
             <a:r>
-              <a:rPr lang="en-US" altLang="zh-TW" i="1" dirty="0" err="1" smtClean="0"/>
+              <a:rPr lang="en-US" altLang="zh-TW" i="1" dirty="0" err="1"/>
               <a:t>Nitter</a:t>
             </a:r>
             <a:r>
-              <a:rPr lang="zh-TW" altLang="en-US" dirty="0" smtClean="0"/>
+              <a:rPr lang="zh-TW" altLang="en-US" dirty="0"/>
               <a:t>）通常會：</a:t>
             </a:r>
           </a:p>
           <a:p>
             <a:r>
-              <a:rPr lang="zh-TW" altLang="en-US" dirty="0" smtClean="0"/>
+              <a:rPr lang="zh-TW" altLang="en-US" dirty="0"/>
               <a:t>在內網跑多個 </a:t>
             </a:r>
             <a:r>
-              <a:rPr lang="en-US" altLang="zh-TW" dirty="0" err="1" smtClean="0"/>
+              <a:rPr lang="en-US" altLang="zh-TW" dirty="0" err="1"/>
               <a:t>Nitter</a:t>
             </a:r>
             <a:r>
-              <a:rPr lang="en-US" altLang="zh-TW" dirty="0" smtClean="0"/>
+              <a:rPr lang="en-US" altLang="zh-TW" dirty="0"/>
               <a:t> </a:t>
             </a:r>
             <a:r>
-              <a:rPr lang="zh-TW" altLang="en-US" dirty="0" smtClean="0"/>
+              <a:rPr lang="zh-TW" altLang="en-US" dirty="0"/>
               <a:t>執行緒（</a:t>
             </a:r>
             <a:r>
-              <a:rPr lang="en-US" altLang="zh-TW" dirty="0" err="1" smtClean="0"/>
+              <a:rPr lang="en-US" altLang="zh-TW" dirty="0" err="1"/>
               <a:t>Golang</a:t>
             </a:r>
             <a:r>
-              <a:rPr lang="en-US" altLang="zh-TW" dirty="0" smtClean="0"/>
+              <a:rPr lang="en-US" altLang="zh-TW" dirty="0"/>
               <a:t> </a:t>
             </a:r>
             <a:r>
-              <a:rPr lang="zh-TW" altLang="en-US" dirty="0" smtClean="0"/>
+              <a:rPr lang="zh-TW" altLang="en-US" dirty="0"/>
               <a:t>或 </a:t>
             </a:r>
             <a:r>
-              <a:rPr lang="en-US" altLang="zh-TW" dirty="0" smtClean="0"/>
+              <a:rPr lang="en-US" altLang="zh-TW" dirty="0"/>
               <a:t>Rust </a:t>
             </a:r>
             <a:r>
-              <a:rPr lang="zh-TW" altLang="en-US" dirty="0" smtClean="0"/>
+              <a:rPr lang="zh-TW" altLang="en-US" dirty="0"/>
               <a:t>服務）</a:t>
             </a:r>
           </a:p>
           <a:p>
             <a:r>
-              <a:rPr lang="zh-TW" altLang="en-US" dirty="0" smtClean="0"/>
+              <a:rPr lang="zh-TW" altLang="en-US" dirty="0"/>
               <a:t>前方放一層 </a:t>
             </a:r>
             <a:r>
-              <a:rPr lang="en-US" altLang="zh-TW" dirty="0" smtClean="0"/>
+              <a:rPr lang="en-US" altLang="zh-TW" dirty="0"/>
               <a:t>Nginx</a:t>
             </a:r>
           </a:p>
           <a:p>
             <a:pPr lvl="1"/>
             <a:r>
-              <a:rPr lang="zh-TW" altLang="en-US" dirty="0" smtClean="0"/>
+              <a:rPr lang="zh-TW" altLang="en-US" dirty="0"/>
               <a:t>反向代理 </a:t>
             </a:r>
             <a:r>
-              <a:rPr lang="en-US" altLang="zh-TW" dirty="0" smtClean="0"/>
+              <a:rPr lang="en-US" altLang="zh-TW" dirty="0"/>
               <a:t>+ </a:t>
             </a:r>
             <a:r>
-              <a:rPr lang="zh-TW" altLang="en-US" dirty="0" smtClean="0"/>
+              <a:rPr lang="zh-TW" altLang="en-US" dirty="0"/>
               <a:t>負載平衡 </a:t>
             </a:r>
             <a:r>
-              <a:rPr lang="en-US" altLang="zh-TW" dirty="0" smtClean="0"/>
+              <a:rPr lang="en-US" altLang="zh-TW" dirty="0"/>
               <a:t>+ TLS</a:t>
             </a:r>
           </a:p>
           <a:p>
             <a:pPr lvl="1"/>
             <a:r>
-              <a:rPr lang="zh-TW" altLang="en-US" dirty="0" smtClean="0"/>
+              <a:rPr lang="zh-TW" altLang="en-US" dirty="0"/>
               <a:t>針對 </a:t>
             </a:r>
             <a:r>
-              <a:rPr lang="en-US" altLang="zh-TW" dirty="0" smtClean="0"/>
+              <a:rPr lang="en-US" altLang="zh-TW" dirty="0"/>
               <a:t>Twitter </a:t>
             </a:r>
             <a:r>
-              <a:rPr lang="zh-TW" altLang="en-US" dirty="0" smtClean="0"/>
+              <a:rPr lang="zh-TW" altLang="en-US" dirty="0"/>
               <a:t>流量做快取，減少 </a:t>
             </a:r>
             <a:r>
-              <a:rPr lang="en-US" altLang="zh-TW" dirty="0" smtClean="0"/>
+              <a:rPr lang="en-US" altLang="zh-TW" dirty="0"/>
               <a:t>API </a:t>
             </a:r>
             <a:r>
-              <a:rPr lang="zh-TW" altLang="en-US" dirty="0" smtClean="0"/>
+              <a:rPr lang="zh-TW" altLang="en-US" dirty="0"/>
               <a:t>壓力</a:t>
             </a:r>
           </a:p>
           <a:p>
             <a:pPr lvl="1"/>
             <a:r>
-              <a:rPr lang="zh-TW" altLang="en-US" dirty="0" smtClean="0"/>
+              <a:rPr lang="zh-TW" altLang="en-US" dirty="0"/>
               <a:t>對外只暴露 </a:t>
             </a:r>
             <a:r>
-              <a:rPr lang="en-US" altLang="zh-TW" dirty="0" smtClean="0"/>
+              <a:rPr lang="en-US" altLang="zh-TW" dirty="0"/>
               <a:t>80/443</a:t>
             </a:r>
             <a:r>
-              <a:rPr lang="zh-TW" altLang="en-US" dirty="0" smtClean="0"/>
+              <a:rPr lang="zh-TW" altLang="en-US" dirty="0"/>
               <a:t>，其他埠完全內部化</a:t>
             </a:r>
           </a:p>
           <a:p>
             <a:r>
-              <a:rPr lang="zh-TW" altLang="en-US" dirty="0" smtClean="0"/>
+              <a:rPr lang="zh-TW" altLang="en-US" dirty="0"/>
               <a:t>這樣既能穩定服務，又能避免直接暴露後端程式或真實 </a:t>
             </a:r>
             <a:r>
-              <a:rPr lang="en-US" altLang="zh-TW" dirty="0" smtClean="0"/>
+              <a:rPr lang="en-US" altLang="zh-TW" dirty="0"/>
               <a:t>IP</a:t>
             </a:r>
             <a:r>
-              <a:rPr lang="zh-TW" altLang="en-US" dirty="0" smtClean="0"/>
+              <a:rPr lang="zh-TW" altLang="en-US" dirty="0"/>
               <a:t>。</a:t>
             </a:r>
           </a:p>
@@ -19165,7 +19037,7 @@
           </a:lstStyle>
           <a:p>
             <a:r>
-              <a:rPr lang="en-US" altLang="zh-TW" sz="2000" dirty="0" smtClean="0"/>
+              <a:rPr lang="en-US" altLang="zh-TW" sz="2000" dirty="0"/>
               <a:t>Group 6</a:t>
             </a:r>
             <a:endParaRPr lang="zh-TW" altLang="en-US" sz="2000" dirty="0"/>
@@ -20755,7 +20627,7 @@
               <a:buFont typeface="Orbitron Black"/>
             </a:pPr>
             <a:r>
-              <a:rPr lang="zh-TW" altLang="en-US" b="1" dirty="0" smtClean="0">
+              <a:rPr lang="zh-TW" altLang="en-US" b="1" dirty="0">
                 <a:latin typeface="Microsoft JhengHei" panose="020B0604030504040204" pitchFamily="34" charset="-120"/>
                 <a:ea typeface="Microsoft JhengHei" panose="020B0604030504040204" pitchFamily="34" charset="-120"/>
               </a:rPr>
@@ -20802,7 +20674,7 @@
               <a:buFont typeface="Orbitron Black"/>
             </a:pPr>
             <a:r>
-              <a:rPr lang="zh-TW" altLang="en-US" b="1" dirty="0" smtClean="0">
+              <a:rPr lang="zh-TW" altLang="en-US" b="1" dirty="0">
                 <a:latin typeface="Microsoft JhengHei" panose="020B0604030504040204" pitchFamily="34" charset="-120"/>
                 <a:ea typeface="Microsoft JhengHei" panose="020B0604030504040204" pitchFamily="34" charset="-120"/>
               </a:rPr>
@@ -20851,7 +20723,7 @@
               <a:buChar char="•"/>
             </a:pPr>
             <a:r>
-              <a:rPr lang="zh-TW" altLang="en-US" b="1" dirty="0" smtClean="0">
+              <a:rPr lang="zh-TW" altLang="en-US" b="1" dirty="0">
                 <a:latin typeface="微軟正黑體" panose="020B0604030504040204" pitchFamily="34" charset="-120"/>
                 <a:ea typeface="微軟正黑體" panose="020B0604030504040204" pitchFamily="34" charset="-120"/>
                 <a:cs typeface="Darker Grotesque"/>
@@ -20860,7 +20732,7 @@
               <a:t>推文</a:t>
             </a:r>
             <a:r>
-              <a:rPr lang="en-US" altLang="zh-TW" b="1" dirty="0" smtClean="0">
+              <a:rPr lang="en-US" altLang="zh-TW" b="1" dirty="0">
                 <a:latin typeface="微軟正黑體" panose="020B0604030504040204" pitchFamily="34" charset="-120"/>
                 <a:ea typeface="微軟正黑體" panose="020B0604030504040204" pitchFamily="34" charset="-120"/>
                 <a:cs typeface="Darker Grotesque"/>
@@ -20869,7 +20741,7 @@
               <a:t>:</a:t>
             </a:r>
             <a:r>
-              <a:rPr lang="zh-TW" altLang="en-US" b="1" dirty="0" smtClean="0">
+              <a:rPr lang="zh-TW" altLang="en-US" b="1" dirty="0">
                 <a:latin typeface="微軟正黑體" panose="020B0604030504040204" pitchFamily="34" charset="-120"/>
                 <a:ea typeface="微軟正黑體" panose="020B0604030504040204" pitchFamily="34" charset="-120"/>
                 <a:cs typeface="Darker Grotesque"/>
@@ -20878,7 +20750,7 @@
               <a:t> </a:t>
             </a:r>
             <a:r>
-              <a:rPr lang="en-US" altLang="zh-TW" b="1" dirty="0" smtClean="0">
+              <a:rPr lang="en-US" altLang="zh-TW" b="1" dirty="0">
                 <a:latin typeface="微軟正黑體" panose="020B0604030504040204" pitchFamily="34" charset="-120"/>
                 <a:ea typeface="微軟正黑體" panose="020B0604030504040204" pitchFamily="34" charset="-120"/>
                 <a:cs typeface="Darker Grotesque"/>
@@ -20899,7 +20771,7 @@
               <a:buChar char="•"/>
             </a:pPr>
             <a:r>
-              <a:rPr lang="zh-TW" altLang="en-US" b="1" dirty="0" smtClean="0">
+              <a:rPr lang="zh-TW" altLang="en-US" b="1" dirty="0">
                 <a:latin typeface="微軟正黑體" panose="020B0604030504040204" pitchFamily="34" charset="-120"/>
                 <a:ea typeface="微軟正黑體" panose="020B0604030504040204" pitchFamily="34" charset="-120"/>
                 <a:cs typeface="Darker Grotesque"/>
@@ -20908,7 +20780,7 @@
               <a:t>檔案大小</a:t>
             </a:r>
             <a:r>
-              <a:rPr lang="en-US" altLang="zh-TW" b="1" dirty="0" smtClean="0">
+              <a:rPr lang="en-US" altLang="zh-TW" b="1" dirty="0">
                 <a:latin typeface="微軟正黑體" panose="020B0604030504040204" pitchFamily="34" charset="-120"/>
                 <a:ea typeface="微軟正黑體" panose="020B0604030504040204" pitchFamily="34" charset="-120"/>
                 <a:cs typeface="Darker Grotesque"/>
@@ -21219,7 +21091,7 @@
                 <a:hlinkClick r:id="rId5" action="ppaction://hlinksldjump">
                   <a:extLst>
                     <a:ext uri="{A12FA001-AC4F-418D-AE19-62706E023703}">
-                      <ahyp:hlinkClr xmlns:ahyp="http://schemas.microsoft.com/office/drawing/2018/hyperlinkcolor" xmlns="" val="tx"/>
+                      <ahyp:hlinkClr xmlns:ahyp="http://schemas.microsoft.com/office/drawing/2018/hyperlinkcolor" val="tx"/>
                     </a:ext>
                   </a:extLst>
                 </a:hlinkClick>
@@ -21948,16 +21820,12 @@
               <a:t>Crypto </a:t>
             </a:r>
             <a:r>
-              <a:rPr lang="zh-TW" altLang="en-US" b="1" dirty="0" smtClean="0">
+              <a:rPr lang="zh-TW" altLang="en-US" b="1" dirty="0">
                 <a:latin typeface="微軟正黑體" panose="020B0604030504040204" pitchFamily="34" charset="-120"/>
                 <a:ea typeface="微軟正黑體" panose="020B0604030504040204" pitchFamily="34" charset="-120"/>
               </a:rPr>
               <a:t>字典</a:t>
             </a:r>
-            <a:endParaRPr lang="zh-TW" altLang="en-US" b="1" dirty="0">
-              <a:latin typeface="微軟正黑體" panose="020B0604030504040204" pitchFamily="34" charset="-120"/>
-              <a:ea typeface="微軟正黑體" panose="020B0604030504040204" pitchFamily="34" charset="-120"/>
-            </a:endParaRPr>
           </a:p>
         </p:txBody>
       </p:sp>
@@ -21971,14 +21839,6 @@
   <p:clrMapOvr>
     <a:masterClrMapping/>
   </p:clrMapOvr>
-  <mc:AlternateContent xmlns:mc="http://schemas.openxmlformats.org/markup-compatibility/2006">
-    <mc:Choice xmlns:p14="http://schemas.microsoft.com/office/powerpoint/2010/main" Requires="p14">
-      <p:transition spd="slow" p14:dur="2000"/>
-    </mc:Choice>
-    <mc:Fallback>
-      <p:transition spd="slow"/>
-    </mc:Fallback>
-  </mc:AlternateContent>
   <p:timing>
     <p:tnLst>
       <p:par>
@@ -22514,7 +22374,7 @@
                         <a:buNone/>
                       </a:pPr>
                       <a:r>
-                        <a:rPr lang="zh-TW" altLang="en-US" sz="1800" b="1" dirty="0" smtClean="0">
+                        <a:rPr lang="zh-TW" altLang="en-US" sz="1800" b="1" dirty="0">
                           <a:solidFill>
                             <a:schemeClr val="dk1"/>
                           </a:solidFill>
@@ -22526,7 +22386,7 @@
                         <a:t>訓練語料 </a:t>
                       </a:r>
                       <a:r>
-                        <a:rPr lang="en-US" altLang="zh-TW" sz="1800" b="1" dirty="0" smtClean="0">
+                        <a:rPr lang="en-US" altLang="zh-TW" sz="1800" b="1" dirty="0">
                           <a:solidFill>
                             <a:schemeClr val="dk1"/>
                           </a:solidFill>
@@ -22538,7 +22398,7 @@
                         <a:t>/ </a:t>
                       </a:r>
                       <a:r>
-                        <a:rPr lang="zh-TW" altLang="en-US" sz="1800" b="1" dirty="0" smtClean="0">
+                        <a:rPr lang="zh-TW" altLang="en-US" sz="1800" b="1" dirty="0">
                           <a:solidFill>
                             <a:schemeClr val="dk1"/>
                           </a:solidFill>
@@ -22621,7 +22481,7 @@
                         <a:buNone/>
                       </a:pPr>
                       <a:r>
-                        <a:rPr lang="en-US" sz="1800" b="1" dirty="0" err="1" smtClean="0">
+                        <a:rPr lang="en-US" sz="1800" b="1" dirty="0" err="1">
                           <a:solidFill>
                             <a:schemeClr val="dk1"/>
                           </a:solidFill>
@@ -22704,7 +22564,7 @@
                         <a:buNone/>
                       </a:pPr>
                       <a:r>
-                        <a:rPr lang="en-US" sz="1800" b="1" i="0" u="none" strike="noStrike" cap="none" dirty="0" smtClean="0">
+                        <a:rPr lang="en-US" sz="1800" b="1" i="0" u="none" strike="noStrike" cap="none" dirty="0">
                           <a:solidFill>
                             <a:schemeClr val="dk1"/>
                           </a:solidFill>
@@ -22716,7 +22576,7 @@
                         <a:t>- 4.9 M </a:t>
                       </a:r>
                       <a:r>
-                        <a:rPr lang="zh-TW" altLang="en-US" sz="1800" b="1" i="0" u="none" strike="noStrike" cap="none" dirty="0" smtClean="0">
+                        <a:rPr lang="zh-TW" altLang="en-US" sz="1800" b="1" i="0" u="none" strike="noStrike" cap="none" dirty="0">
                           <a:solidFill>
                             <a:schemeClr val="dk1"/>
                           </a:solidFill>
@@ -22728,7 +22588,7 @@
                         <a:t>以上金融新聞、</a:t>
                       </a:r>
                       <a:r>
-                        <a:rPr lang="en-US" altLang="zh-TW" sz="1800" b="1" i="0" u="none" strike="noStrike" cap="none" dirty="0" smtClean="0">
+                        <a:rPr lang="en-US" altLang="zh-TW" sz="1800" b="1" i="0" u="none" strike="noStrike" cap="none" dirty="0">
                           <a:solidFill>
                             <a:schemeClr val="dk1"/>
                           </a:solidFill>
@@ -22740,7 +22600,7 @@
                         <a:t>10-</a:t>
                       </a:r>
                       <a:r>
-                        <a:rPr lang="en-US" sz="1800" b="1" i="0" u="none" strike="noStrike" cap="none" dirty="0" smtClean="0">
+                        <a:rPr lang="en-US" sz="1800" b="1" i="0" u="none" strike="noStrike" cap="none" dirty="0">
                           <a:solidFill>
                             <a:schemeClr val="dk1"/>
                           </a:solidFill>
@@ -22752,7 +22612,7 @@
                         <a:t>K </a:t>
                       </a:r>
                       <a:r>
-                        <a:rPr lang="zh-TW" altLang="en-US" sz="1800" b="1" i="0" u="none" strike="noStrike" cap="none" dirty="0" smtClean="0">
+                        <a:rPr lang="zh-TW" altLang="en-US" sz="1800" b="1" i="0" u="none" strike="noStrike" cap="none" dirty="0">
                           <a:solidFill>
                             <a:schemeClr val="dk1"/>
                           </a:solidFill>
@@ -22764,7 +22624,7 @@
                         <a:t>報告等金融文本，再以 </a:t>
                       </a:r>
                       <a:r>
-                        <a:rPr lang="en-US" sz="1800" b="1" i="0" u="none" strike="noStrike" cap="none" dirty="0" smtClean="0">
+                        <a:rPr lang="en-US" sz="1800" b="1" i="0" u="none" strike="noStrike" cap="none" dirty="0">
                           <a:solidFill>
                             <a:schemeClr val="dk1"/>
                           </a:solidFill>
@@ -22776,7 +22636,7 @@
                         <a:t>Financial </a:t>
                       </a:r>
                       <a:r>
-                        <a:rPr lang="en-US" sz="1800" b="1" i="0" u="none" strike="noStrike" cap="none" dirty="0" err="1" smtClean="0">
+                        <a:rPr lang="en-US" sz="1800" b="1" i="0" u="none" strike="noStrike" cap="none" dirty="0" err="1">
                           <a:solidFill>
                             <a:schemeClr val="dk1"/>
                           </a:solidFill>
@@ -22788,7 +22648,7 @@
                         <a:t>PhraseBank</a:t>
                       </a:r>
                       <a:r>
-                        <a:rPr lang="en-US" sz="1800" b="1" i="0" u="none" strike="noStrike" cap="none" dirty="0" smtClean="0">
+                        <a:rPr lang="en-US" sz="1800" b="1" i="0" u="none" strike="noStrike" cap="none" dirty="0">
                           <a:solidFill>
                             <a:schemeClr val="dk1"/>
                           </a:solidFill>
@@ -22800,7 +22660,7 @@
                         <a:t> </a:t>
                       </a:r>
                       <a:r>
-                        <a:rPr lang="zh-TW" altLang="en-US" sz="1800" b="1" i="0" u="none" strike="noStrike" cap="none" dirty="0" smtClean="0">
+                        <a:rPr lang="zh-TW" altLang="en-US" sz="1800" b="1" i="0" u="none" strike="noStrike" cap="none" dirty="0">
                           <a:solidFill>
                             <a:schemeClr val="dk1"/>
                           </a:solidFill>
@@ -22883,7 +22743,7 @@
                         <a:buNone/>
                       </a:pPr>
                       <a:r>
-                        <a:rPr lang="en-US" sz="1800" b="1" dirty="0" err="1" smtClean="0">
+                        <a:rPr lang="en-US" sz="1800" b="1" dirty="0" err="1">
                           <a:solidFill>
                             <a:schemeClr val="dk1"/>
                           </a:solidFill>
@@ -22966,7 +22826,7 @@
                         <a:buNone/>
                       </a:pPr>
                       <a:r>
-                        <a:rPr lang="en-US" altLang="zh-TW" sz="1800" b="1" i="0" u="none" strike="noStrike" cap="none" dirty="0" smtClean="0">
+                        <a:rPr lang="en-US" altLang="zh-TW" sz="1800" b="1" i="0" u="none" strike="noStrike" cap="none" dirty="0">
                           <a:solidFill>
                             <a:schemeClr val="dk1"/>
                           </a:solidFill>
@@ -22978,7 +22838,7 @@
                         <a:t>320 </a:t>
                       </a:r>
                       <a:r>
-                        <a:rPr lang="zh-TW" altLang="en-US" sz="1800" b="1" i="0" u="none" strike="noStrike" cap="none" dirty="0" smtClean="0">
+                        <a:rPr lang="zh-TW" altLang="en-US" sz="1800" b="1" i="0" u="none" strike="noStrike" cap="none" dirty="0">
                           <a:solidFill>
                             <a:schemeClr val="dk1"/>
                           </a:solidFill>
@@ -22990,7 +22850,7 @@
                         <a:t>萬條加密貨幣推文 </a:t>
                       </a:r>
                       <a:r>
-                        <a:rPr lang="en-US" altLang="zh-TW" sz="1800" b="1" i="0" u="none" strike="noStrike" cap="none" dirty="0" smtClean="0">
+                        <a:rPr lang="en-US" altLang="zh-TW" sz="1800" b="1" i="0" u="none" strike="noStrike" cap="none" dirty="0">
                           <a:solidFill>
                             <a:schemeClr val="dk1"/>
                           </a:solidFill>
@@ -23002,7 +22862,7 @@
                         <a:t>(</a:t>
                       </a:r>
                       <a:r>
-                        <a:rPr lang="en-US" sz="1800" b="1" i="0" u="none" strike="noStrike" cap="none" dirty="0" smtClean="0">
+                        <a:rPr lang="en-US" sz="1800" b="1" i="0" u="none" strike="noStrike" cap="none" dirty="0">
                           <a:solidFill>
                             <a:schemeClr val="dk1"/>
                           </a:solidFill>
@@ -23014,7 +22874,7 @@
                         <a:t>Twitter / </a:t>
                       </a:r>
                       <a:r>
-                        <a:rPr lang="en-US" sz="1800" b="1" i="0" u="none" strike="noStrike" cap="none" dirty="0" err="1" smtClean="0">
+                        <a:rPr lang="en-US" sz="1800" b="1" i="0" u="none" strike="noStrike" cap="none" dirty="0" err="1">
                           <a:solidFill>
                             <a:schemeClr val="dk1"/>
                           </a:solidFill>
@@ -23026,7 +22886,7 @@
                         <a:t>Reddit</a:t>
                       </a:r>
                       <a:r>
-                        <a:rPr lang="en-US" sz="1800" b="1" i="0" u="none" strike="noStrike" cap="none" dirty="0" smtClean="0">
+                        <a:rPr lang="en-US" sz="1800" b="1" i="0" u="none" strike="noStrike" cap="none" dirty="0">
                           <a:solidFill>
                             <a:schemeClr val="dk1"/>
                           </a:solidFill>
@@ -23038,7 +22898,7 @@
                         <a:t>) </a:t>
                       </a:r>
                       <a:r>
-                        <a:rPr lang="zh-TW" altLang="en-US" sz="1800" b="1" i="0" u="none" strike="noStrike" cap="none" dirty="0" smtClean="0">
+                        <a:rPr lang="zh-TW" altLang="en-US" sz="1800" b="1" i="0" u="none" strike="noStrike" cap="none" dirty="0">
                           <a:solidFill>
                             <a:schemeClr val="dk1"/>
                           </a:solidFill>
@@ -23050,7 +22910,7 @@
                         <a:t>進一步在 </a:t>
                       </a:r>
                       <a:r>
-                        <a:rPr lang="en-US" sz="1800" b="1" i="0" u="none" strike="noStrike" cap="none" dirty="0" smtClean="0">
+                        <a:rPr lang="en-US" sz="1800" b="1" i="0" u="none" strike="noStrike" cap="none" dirty="0">
                           <a:solidFill>
                             <a:schemeClr val="dk1"/>
                           </a:solidFill>
@@ -23062,7 +22922,7 @@
                         <a:t>Twitter-</a:t>
                       </a:r>
                       <a:r>
-                        <a:rPr lang="en-US" sz="1800" b="1" i="0" u="none" strike="noStrike" cap="none" dirty="0" err="1" smtClean="0">
+                        <a:rPr lang="en-US" sz="1800" b="1" i="0" u="none" strike="noStrike" cap="none" dirty="0" err="1">
                           <a:solidFill>
                             <a:schemeClr val="dk1"/>
                           </a:solidFill>
@@ -23074,7 +22934,7 @@
                         <a:t>RoBERTa</a:t>
                       </a:r>
                       <a:r>
-                        <a:rPr lang="en-US" sz="1800" b="1" i="0" u="none" strike="noStrike" cap="none" dirty="0" smtClean="0">
+                        <a:rPr lang="en-US" sz="1800" b="1" i="0" u="none" strike="noStrike" cap="none" dirty="0">
                           <a:solidFill>
                             <a:schemeClr val="dk1"/>
                           </a:solidFill>
@@ -23086,7 +22946,7 @@
                         <a:t> </a:t>
                       </a:r>
                       <a:r>
-                        <a:rPr lang="zh-TW" altLang="en-US" sz="1800" b="1" i="0" u="none" strike="noStrike" cap="none" dirty="0" smtClean="0">
+                        <a:rPr lang="zh-TW" altLang="en-US" sz="1800" b="1" i="0" u="none" strike="noStrike" cap="none" dirty="0">
                           <a:solidFill>
                             <a:schemeClr val="dk1"/>
                           </a:solidFill>
@@ -23169,7 +23029,7 @@
                         <a:buNone/>
                       </a:pPr>
                       <a:r>
-                        <a:rPr lang="en-US" sz="1800" b="1" dirty="0" err="1" smtClean="0">
+                        <a:rPr lang="en-US" sz="1800" b="1" dirty="0" err="1">
                           <a:solidFill>
                             <a:schemeClr val="dk1"/>
                           </a:solidFill>
@@ -23181,7 +23041,7 @@
                         <a:t>RoBERTa</a:t>
                       </a:r>
                       <a:r>
-                        <a:rPr lang="en-US" sz="1800" b="1" dirty="0" smtClean="0">
+                        <a:rPr lang="en-US" sz="1800" b="1" dirty="0">
                           <a:solidFill>
                             <a:schemeClr val="dk1"/>
                           </a:solidFill>
@@ -23264,7 +23124,7 @@
                         <a:buNone/>
                       </a:pPr>
                       <a:r>
-                        <a:rPr lang="en-US" sz="1800" b="1" i="0" u="none" strike="noStrike" cap="none" dirty="0" smtClean="0">
+                        <a:rPr lang="en-US" sz="1800" b="1" i="0" u="none" strike="noStrike" cap="none" dirty="0">
                           <a:solidFill>
                             <a:schemeClr val="dk1"/>
                           </a:solidFill>
@@ -23276,7 +23136,7 @@
                         <a:t>160 GB </a:t>
                       </a:r>
                       <a:r>
-                        <a:rPr lang="zh-TW" altLang="en-US" sz="1800" b="1" i="0" u="none" strike="noStrike" cap="none" dirty="0" smtClean="0">
+                        <a:rPr lang="zh-TW" altLang="en-US" sz="1800" b="1" i="0" u="none" strike="noStrike" cap="none" dirty="0">
                           <a:solidFill>
                             <a:schemeClr val="dk1"/>
                           </a:solidFill>
@@ -23288,7 +23148,7 @@
                         <a:t>通用英文語料 </a:t>
                       </a:r>
                       <a:r>
-                        <a:rPr lang="en-US" altLang="zh-TW" sz="1800" b="1" i="0" u="none" strike="noStrike" cap="none" dirty="0" smtClean="0">
+                        <a:rPr lang="en-US" altLang="zh-TW" sz="1800" b="1" i="0" u="none" strike="noStrike" cap="none" dirty="0">
                           <a:solidFill>
                             <a:schemeClr val="dk1"/>
                           </a:solidFill>
@@ -23300,7 +23160,7 @@
                         <a:t>(</a:t>
                       </a:r>
                       <a:r>
-                        <a:rPr lang="en-US" sz="1800" b="1" i="0" u="none" strike="noStrike" cap="none" dirty="0" smtClean="0">
+                        <a:rPr lang="en-US" sz="1800" b="1" i="0" u="none" strike="noStrike" cap="none" dirty="0">
                           <a:solidFill>
                             <a:schemeClr val="dk1"/>
                           </a:solidFill>
@@ -23312,7 +23172,7 @@
                         <a:t>Book-Wiki + Web) </a:t>
                       </a:r>
                       <a:r>
-                        <a:rPr lang="zh-TW" altLang="en-US" sz="1800" b="1" i="0" u="none" strike="noStrike" cap="none" dirty="0" smtClean="0">
+                        <a:rPr lang="zh-TW" altLang="en-US" sz="1800" b="1" i="0" u="none" strike="noStrike" cap="none" dirty="0">
                           <a:solidFill>
                             <a:schemeClr val="dk1"/>
                           </a:solidFill>
@@ -23324,7 +23184,7 @@
                         <a:t>無監督自訓；非金融</a:t>
                       </a:r>
                       <a:r>
-                        <a:rPr lang="en-US" altLang="zh-TW" sz="1800" b="1" i="0" u="none" strike="noStrike" cap="none" dirty="0" smtClean="0">
+                        <a:rPr lang="en-US" altLang="zh-TW" sz="1800" b="1" i="0" u="none" strike="noStrike" cap="none" dirty="0">
                           <a:solidFill>
                             <a:schemeClr val="dk1"/>
                           </a:solidFill>
@@ -23336,7 +23196,7 @@
                         <a:t>/</a:t>
                       </a:r>
                       <a:r>
-                        <a:rPr lang="zh-TW" altLang="en-US" sz="1800" b="1" i="0" u="none" strike="noStrike" cap="none" dirty="0" smtClean="0">
+                        <a:rPr lang="zh-TW" altLang="en-US" sz="1800" b="1" i="0" u="none" strike="noStrike" cap="none" dirty="0">
                           <a:solidFill>
                             <a:schemeClr val="dk1"/>
                           </a:solidFill>
@@ -23674,7 +23534,7 @@
                 <a:hlinkClick r:id="" action="ppaction://noaction">
                   <a:extLst>
                     <a:ext uri="{A12FA001-AC4F-418D-AE19-62706E023703}">
-                      <ahyp:hlinkClr xmlns:ahyp="http://schemas.microsoft.com/office/drawing/2018/hyperlinkcolor" xmlns="" val="tx"/>
+                      <ahyp:hlinkClr xmlns:ahyp="http://schemas.microsoft.com/office/drawing/2018/hyperlinkcolor" val="tx"/>
                     </a:ext>
                   </a:extLst>
                 </a:hlinkClick>
@@ -24384,14 +24244,6 @@
   <p:clrMapOvr>
     <a:masterClrMapping/>
   </p:clrMapOvr>
-  <mc:AlternateContent xmlns:mc="http://schemas.openxmlformats.org/markup-compatibility/2006">
-    <mc:Choice xmlns:p14="http://schemas.microsoft.com/office/powerpoint/2010/main" Requires="p14">
-      <p:transition spd="slow" p14:dur="2000"/>
-    </mc:Choice>
-    <mc:Fallback>
-      <p:transition spd="slow"/>
-    </mc:Fallback>
-  </mc:AlternateContent>
 </p:sld>
 </file>
 
@@ -25696,28 +25548,28 @@
               </a:lnSpc>
             </a:pPr>
             <a:r>
-              <a:rPr lang="zh-TW" altLang="en-US" sz="3200" b="1" dirty="0" smtClean="0">
+              <a:rPr lang="zh-TW" altLang="en-US" sz="3200" b="1" dirty="0">
                 <a:latin typeface="微軟正黑體" panose="020B0604030504040204" pitchFamily="34" charset="-120"/>
                 <a:ea typeface="微軟正黑體" panose="020B0604030504040204" pitchFamily="34" charset="-120"/>
               </a:rPr>
               <a:t>結論</a:t>
             </a:r>
             <a:r>
-              <a:rPr lang="en-US" altLang="zh-TW" sz="3200" b="1" dirty="0" smtClean="0">
+              <a:rPr lang="en-US" altLang="zh-TW" sz="3200" b="1" dirty="0">
                 <a:latin typeface="微軟正黑體" panose="020B0604030504040204" pitchFamily="34" charset="-120"/>
                 <a:ea typeface="微軟正黑體" panose="020B0604030504040204" pitchFamily="34" charset="-120"/>
               </a:rPr>
               <a:t>:</a:t>
             </a:r>
             <a:r>
-              <a:rPr lang="zh-TW" altLang="en-US" sz="3200" b="1" dirty="0" smtClean="0">
+              <a:rPr lang="zh-TW" altLang="en-US" sz="3200" b="1" dirty="0">
                 <a:latin typeface="微軟正黑體" panose="020B0604030504040204" pitchFamily="34" charset="-120"/>
                 <a:ea typeface="微軟正黑體" panose="020B0604030504040204" pitchFamily="34" charset="-120"/>
               </a:rPr>
               <a:t> </a:t>
             </a:r>
             <a:r>
-              <a:rPr lang="en-US" altLang="zh-TW" sz="3200" b="1" dirty="0" smtClean="0">
+              <a:rPr lang="en-US" altLang="zh-TW" sz="3200" b="1" dirty="0">
                 <a:latin typeface="微軟正黑體" panose="020B0604030504040204" pitchFamily="34" charset="-120"/>
                 <a:ea typeface="微軟正黑體" panose="020B0604030504040204" pitchFamily="34" charset="-120"/>
               </a:rPr>
@@ -27333,14 +27185,7 @@
                 <a:latin typeface="Microsoft JhengHei" panose="020B0604030504040204" pitchFamily="34" charset="-120"/>
                 <a:ea typeface="Microsoft JhengHei" panose="020B0604030504040204" pitchFamily="34" charset="-120"/>
               </a:rPr>
-              <a:t>前端</a:t>
-            </a:r>
-            <a:r>
-              <a:rPr lang="zh-TW" altLang="en-US" b="1" dirty="0" smtClean="0">
-                <a:latin typeface="Microsoft JhengHei" panose="020B0604030504040204" pitchFamily="34" charset="-120"/>
-                <a:ea typeface="Microsoft JhengHei" panose="020B0604030504040204" pitchFamily="34" charset="-120"/>
-              </a:rPr>
-              <a:t>架構</a:t>
+              <a:t>前端架構</a:t>
             </a:r>
             <a:endParaRPr b="1" dirty="0">
               <a:latin typeface="Microsoft JhengHei" panose="020B0604030504040204" pitchFamily="34" charset="-120"/>
@@ -27966,14 +27811,7 @@
                 <a:latin typeface="Microsoft JhengHei" panose="020B0604030504040204" pitchFamily="34" charset="-120"/>
                 <a:ea typeface="Microsoft JhengHei" panose="020B0604030504040204" pitchFamily="34" charset="-120"/>
               </a:rPr>
-              <a:t>前端</a:t>
-            </a:r>
-            <a:r>
-              <a:rPr lang="zh-TW" altLang="en-US" b="1" dirty="0" smtClean="0">
-                <a:latin typeface="Microsoft JhengHei" panose="020B0604030504040204" pitchFamily="34" charset="-120"/>
-                <a:ea typeface="Microsoft JhengHei" panose="020B0604030504040204" pitchFamily="34" charset="-120"/>
-              </a:rPr>
-              <a:t>架構</a:t>
+              <a:t>前端架構</a:t>
             </a:r>
             <a:endParaRPr b="1" dirty="0">
               <a:latin typeface="Microsoft JhengHei" panose="020B0604030504040204" pitchFamily="34" charset="-120"/>
@@ -28826,8 +28664,8 @@
           </a:p>
         </p:txBody>
       </p:sp>
-      <mc:AlternateContent xmlns:mc="http://schemas.openxmlformats.org/markup-compatibility/2006">
-        <mc:Choice xmlns:a14="http://schemas.microsoft.com/office/drawing/2010/main" Requires="a14">
+      <mc:AlternateContent xmlns:mc="http://schemas.openxmlformats.org/markup-compatibility/2006" xmlns:a14="http://schemas.microsoft.com/office/drawing/2010/main">
+        <mc:Choice Requires="a14">
           <p:sp>
             <p:nvSpPr>
               <p:cNvPr id="4" name="文字方塊 3">
@@ -28857,14 +28695,14 @@
               <a:lstStyle/>
               <a:p>
                 <a:r>
-                  <a:rPr lang="zh-TW" altLang="en-US" sz="2800" dirty="0" smtClean="0">
+                  <a:rPr lang="zh-TW" altLang="en-US" sz="2800" dirty="0">
                     <a:latin typeface="微軟正黑體" panose="020B0604030504040204" pitchFamily="34" charset="-120"/>
                     <a:ea typeface="微軟正黑體" panose="020B0604030504040204" pitchFamily="34" charset="-120"/>
                   </a:rPr>
                   <a:t>組成</a:t>
                 </a:r>
                 <a:r>
-                  <a:rPr lang="en-US" altLang="zh-TW" sz="2800" dirty="0" smtClean="0">
+                  <a:rPr lang="en-US" altLang="zh-TW" sz="2800" dirty="0">
                     <a:latin typeface="微軟正黑體" panose="020B0604030504040204" pitchFamily="34" charset="-120"/>
                     <a:ea typeface="微軟正黑體" panose="020B0604030504040204" pitchFamily="34" charset="-120"/>
                   </a:rPr>
@@ -28923,49 +28761,34 @@
                   <a:t> </a:t>
                 </a:r>
                 <a:r>
-                  <a:rPr lang="en-US" altLang="zh-TW" sz="2800" dirty="0" smtClean="0">
+                  <a:rPr lang="en-US" altLang="zh-TW" sz="2800" dirty="0">
                     <a:latin typeface="微軟正黑體" panose="020B0604030504040204" pitchFamily="34" charset="-120"/>
                     <a:ea typeface="微軟正黑體" panose="020B0604030504040204" pitchFamily="34" charset="-120"/>
                   </a:rPr>
                   <a:t>: </a:t>
                 </a:r>
                 <a:r>
-                  <a:rPr lang="zh-TW" altLang="en-US" sz="2800" dirty="0" smtClean="0">
-                    <a:latin typeface="微軟正黑體" panose="020B0604030504040204" pitchFamily="34" charset="-120"/>
-                    <a:ea typeface="微軟正黑體" panose="020B0604030504040204" pitchFamily="34" charset="-120"/>
-                  </a:rPr>
-                  <a:t>均</a:t>
-                </a:r>
-                <a:r>
                   <a:rPr lang="zh-TW" altLang="en-US" sz="2800" dirty="0">
                     <a:latin typeface="微軟正黑體" panose="020B0604030504040204" pitchFamily="34" charset="-120"/>
                     <a:ea typeface="微軟正黑體" panose="020B0604030504040204" pitchFamily="34" charset="-120"/>
                   </a:rPr>
-                  <a:t>值向量 </a:t>
+                  <a:t>均值向量 </a:t>
                 </a:r>
                 <a:r>
                   <a:rPr lang="en-US" altLang="zh-TW" sz="2800" dirty="0">
                     <a:latin typeface="微軟正黑體" panose="020B0604030504040204" pitchFamily="34" charset="-120"/>
                     <a:ea typeface="微軟正黑體" panose="020B0604030504040204" pitchFamily="34" charset="-120"/>
                   </a:rPr>
-                  <a:t>(mean vector</a:t>
-                </a:r>
-                <a:r>
-                  <a:rPr lang="en-US" altLang="zh-TW" sz="2800" dirty="0" smtClean="0">
-                    <a:latin typeface="微軟正黑體" panose="020B0604030504040204" pitchFamily="34" charset="-120"/>
-                    <a:ea typeface="微軟正黑體" panose="020B0604030504040204" pitchFamily="34" charset="-120"/>
-                  </a:rPr>
-                  <a:t>)</a:t>
+                  <a:t>(mean vector)</a:t>
                 </a:r>
               </a:p>
               <a:p>
-                <a:endParaRPr lang="en-US" altLang="zh-TW" sz="2800" dirty="0" smtClean="0">
+                <a:endParaRPr lang="en-US" altLang="zh-TW" sz="2800" dirty="0">
                   <a:latin typeface="微軟正黑體" panose="020B0604030504040204" pitchFamily="34" charset="-120"/>
                   <a:ea typeface="微軟正黑體" panose="020B0604030504040204" pitchFamily="34" charset="-120"/>
                 </a:endParaRPr>
               </a:p>
               <a:p>
-                <a:pPr/>
                 <a14:m>
                   <m:oMath xmlns:m="http://schemas.openxmlformats.org/officeDocument/2006/math">
                     <m:r>
@@ -29041,7 +28864,7 @@
                   </m:oMath>
                 </a14:m>
                 <a:r>
-                  <a:rPr lang="en-US" altLang="zh-TW" sz="2800" dirty="0" smtClean="0">
+                  <a:rPr lang="en-US" altLang="zh-TW" sz="2800" dirty="0">
                     <a:latin typeface="微軟正黑體" panose="020B0604030504040204" pitchFamily="34" charset="-120"/>
                     <a:ea typeface="微軟正黑體" panose="020B0604030504040204" pitchFamily="34" charset="-120"/>
                   </a:rPr>
@@ -29059,18 +28882,10 @@
                     <a:latin typeface="微軟正黑體" panose="020B0604030504040204" pitchFamily="34" charset="-120"/>
                     <a:ea typeface="微軟正黑體" panose="020B0604030504040204" pitchFamily="34" charset="-120"/>
                   </a:rPr>
-                  <a:t>(covariance matrix</a:t>
-                </a:r>
-                <a:r>
-                  <a:rPr lang="en-US" altLang="zh-TW" sz="2800" dirty="0" smtClean="0">
-                    <a:latin typeface="微軟正黑體" panose="020B0604030504040204" pitchFamily="34" charset="-120"/>
-                    <a:ea typeface="微軟正黑體" panose="020B0604030504040204" pitchFamily="34" charset="-120"/>
-                  </a:rPr>
-                  <a:t>)</a:t>
+                  <a:t>(covariance matrix)</a:t>
                 </a:r>
               </a:p>
               <a:p>
-                <a:pPr/>
                 <a:endParaRPr lang="en-US" altLang="zh-TW" sz="2800" dirty="0">
                   <a:latin typeface="微軟正黑體" panose="020B0604030504040204" pitchFamily="34" charset="-120"/>
                   <a:ea typeface="微軟正黑體" panose="020B0604030504040204" pitchFamily="34" charset="-120"/>
@@ -29086,16 +28901,9 @@
                     <a:latin typeface="微軟正黑體" panose="020B0604030504040204" pitchFamily="34" charset="-120"/>
                     <a:ea typeface="微軟正黑體" panose="020B0604030504040204" pitchFamily="34" charset="-120"/>
                   </a:rPr>
-                  <a:t>季節性平滑</a:t>
+                  <a:t>季節性平滑跨度</a:t>
                 </a:r>
-                <a:r>
-                  <a:rPr lang="zh-TW" altLang="en-US" sz="2800" dirty="0" smtClean="0">
-                    <a:latin typeface="微軟正黑體" panose="020B0604030504040204" pitchFamily="34" charset="-120"/>
-                    <a:ea typeface="微軟正黑體" panose="020B0604030504040204" pitchFamily="34" charset="-120"/>
-                  </a:rPr>
-                  <a:t>跨度</a:t>
-                </a:r>
-                <a:endParaRPr lang="en-US" altLang="zh-TW" sz="2800" dirty="0" smtClean="0">
+                <a:endParaRPr lang="en-US" altLang="zh-TW" sz="2800" dirty="0">
                   <a:latin typeface="微軟正黑體" panose="020B0604030504040204" pitchFamily="34" charset="-120"/>
                   <a:ea typeface="微軟正黑體" panose="020B0604030504040204" pitchFamily="34" charset="-120"/>
                 </a:endParaRPr>
@@ -29110,16 +28918,9 @@
                     <a:latin typeface="微軟正黑體" panose="020B0604030504040204" pitchFamily="34" charset="-120"/>
                     <a:ea typeface="微軟正黑體" panose="020B0604030504040204" pitchFamily="34" charset="-120"/>
                   </a:rPr>
-                  <a:t>外循環迭代</a:t>
+                  <a:t>外循環迭代次數</a:t>
                 </a:r>
-                <a:r>
-                  <a:rPr lang="zh-TW" altLang="en-US" sz="2800" dirty="0" smtClean="0">
-                    <a:latin typeface="微軟正黑體" panose="020B0604030504040204" pitchFamily="34" charset="-120"/>
-                    <a:ea typeface="微軟正黑體" panose="020B0604030504040204" pitchFamily="34" charset="-120"/>
-                  </a:rPr>
-                  <a:t>次數</a:t>
-                </a:r>
-                <a:endParaRPr lang="en-US" altLang="zh-TW" sz="2800" dirty="0" smtClean="0">
+                <a:endParaRPr lang="en-US" altLang="zh-TW" sz="2800" dirty="0">
                   <a:latin typeface="微軟正黑體" panose="020B0604030504040204" pitchFamily="34" charset="-120"/>
                   <a:ea typeface="微軟正黑體" panose="020B0604030504040204" pitchFamily="34" charset="-120"/>
                 </a:endParaRPr>
@@ -29136,15 +28937,11 @@
                   </a:rPr>
                   <a:t>內循環迭代次數</a:t>
                 </a:r>
-                <a:endParaRPr lang="zh-TW" altLang="en-US" sz="2800" dirty="0">
-                  <a:latin typeface="微軟正黑體" panose="020B0604030504040204" pitchFamily="34" charset="-120"/>
-                  <a:ea typeface="微軟正黑體" panose="020B0604030504040204" pitchFamily="34" charset="-120"/>
-                </a:endParaRPr>
               </a:p>
             </p:txBody>
           </p:sp>
         </mc:Choice>
-        <mc:Fallback>
+        <mc:Fallback xmlns="">
           <p:sp>
             <p:nvSpPr>
               <p:cNvPr id="4" name="文字方塊 3">
@@ -29210,7 +29007,7 @@
         <p:cNvPr id="1" name="Shape 793">
           <a:extLst>
             <a:ext uri="{FF2B5EF4-FFF2-40B4-BE49-F238E27FC236}">
-              <a16:creationId xmlns:a16="http://schemas.microsoft.com/office/drawing/2014/main" id="{A5DDAAC3-597C-D175-3779-12D12F5F388D}"/>
+              <a16:creationId xmlns:a16="http://schemas.microsoft.com/office/drawing/2014/main" id="{38BDFF45-E778-C13C-8F4F-903F9E38C647}"/>
             </a:ext>
           </a:extLst>
         </p:cNvPr>
@@ -29227,49 +29024,38 @@
       </p:grpSpPr>
       <p:pic>
         <p:nvPicPr>
-          <p:cNvPr id="11266" name="Picture 2" descr="已上傳的圖像"/>
+          <p:cNvPr id="5" name="圖片 4">
+            <a:extLst>
+              <a:ext uri="{FF2B5EF4-FFF2-40B4-BE49-F238E27FC236}">
+                <a16:creationId xmlns:a16="http://schemas.microsoft.com/office/drawing/2014/main" id="{00A8F60A-69D1-73D7-4E47-0A000ED44222}"/>
+              </a:ext>
+            </a:extLst>
+          </p:cNvPr>
           <p:cNvPicPr>
-            <a:picLocks noChangeAspect="1" noChangeArrowheads="1"/>
+            <a:picLocks noChangeAspect="1"/>
           </p:cNvPicPr>
           <p:nvPr/>
         </p:nvPicPr>
         <p:blipFill>
-          <a:blip r:embed="rId3">
-            <a:extLst>
-              <a:ext uri="{28A0092B-C50C-407E-A947-70E740481C1C}">
-                <a14:useLocalDpi xmlns:a14="http://schemas.microsoft.com/office/drawing/2010/main" val="0"/>
-              </a:ext>
-            </a:extLst>
-          </a:blip>
-          <a:srcRect/>
+          <a:blip r:embed="rId3"/>
           <a:stretch>
             <a:fillRect/>
           </a:stretch>
         </p:blipFill>
-        <p:spPr bwMode="auto">
+        <p:spPr>
           <a:xfrm>
-            <a:off x="482600" y="185737"/>
-            <a:ext cx="7774415" cy="4805363"/>
+            <a:off x="134289" y="0"/>
+            <a:ext cx="8875421" cy="5143500"/>
           </a:xfrm>
           <a:prstGeom prst="rect">
             <a:avLst/>
           </a:prstGeom>
-          <a:noFill/>
-          <a:extLst>
-            <a:ext uri="{909E8E84-426E-40DD-AFC4-6F175D3DCCD1}">
-              <a14:hiddenFill xmlns:a14="http://schemas.microsoft.com/office/drawing/2010/main">
-                <a:solidFill>
-                  <a:srgbClr val="FFFFFF"/>
-                </a:solidFill>
-              </a14:hiddenFill>
-            </a:ext>
-          </a:extLst>
         </p:spPr>
       </p:pic>
     </p:spTree>
     <p:extLst>
       <p:ext uri="{BB962C8B-B14F-4D97-AF65-F5344CB8AC3E}">
-        <p14:creationId xmlns:p14="http://schemas.microsoft.com/office/powerpoint/2010/main" val="2310434439"/>
+        <p14:creationId xmlns:p14="http://schemas.microsoft.com/office/powerpoint/2010/main" val="3507217076"/>
       </p:ext>
     </p:extLst>
   </p:cSld>
@@ -29440,19 +29226,6 @@
               </a:rPr>
               <a:t>資料來源與</a:t>
             </a:r>
-            <a:r>
-              <a:rPr lang="en-US" altLang="zh-TW" b="1" dirty="0">
-                <a:solidFill>
-                  <a:schemeClr val="accent1"/>
-                </a:solidFill>
-                <a:uFill>
-                  <a:noFill/>
-                </a:uFill>
-                <a:latin typeface="Microsoft JhengHei" panose="020B0604030504040204" pitchFamily="34" charset="-120"/>
-                <a:ea typeface="Microsoft JhengHei" panose="020B0604030504040204" pitchFamily="34" charset="-120"/>
-              </a:rPr>
-              <a:t/>
-            </a:r>
             <a:br>
               <a:rPr lang="en-US" altLang="zh-TW" b="1" dirty="0">
                 <a:solidFill>
@@ -29582,19 +29355,6 @@
                 <a:ea typeface="Microsoft JhengHei" panose="020B0604030504040204" pitchFamily="34" charset="-120"/>
               </a:rPr>
               <a:t>視覺化</a:t>
-            </a:r>
-            <a:r>
-              <a:rPr lang="en-US" altLang="zh-TW" b="1" dirty="0">
-                <a:solidFill>
-                  <a:schemeClr val="accent1"/>
-                </a:solidFill>
-                <a:uFill>
-                  <a:noFill/>
-                </a:uFill>
-                <a:latin typeface="Microsoft JhengHei" panose="020B0604030504040204" pitchFamily="34" charset="-120"/>
-                <a:ea typeface="Microsoft JhengHei" panose="020B0604030504040204" pitchFamily="34" charset="-120"/>
-              </a:rPr>
-              <a:t/>
             </a:r>
             <a:br>
               <a:rPr lang="en-US" altLang="zh-TW" b="1" dirty="0">
@@ -30013,19 +29773,6 @@
                 <a:ea typeface="Microsoft JhengHei" panose="020B0604030504040204" pitchFamily="34" charset="-120"/>
               </a:rPr>
               <a:t>總結 </a:t>
-            </a:r>
-            <a:r>
-              <a:rPr lang="en-US" altLang="zh-TW" b="1" dirty="0">
-                <a:solidFill>
-                  <a:schemeClr val="accent1"/>
-                </a:solidFill>
-                <a:uFill>
-                  <a:noFill/>
-                </a:uFill>
-                <a:latin typeface="Microsoft JhengHei" panose="020B0604030504040204" pitchFamily="34" charset="-120"/>
-                <a:ea typeface="Microsoft JhengHei" panose="020B0604030504040204" pitchFamily="34" charset="-120"/>
-              </a:rPr>
-              <a:t/>
             </a:r>
             <a:br>
               <a:rPr lang="en-US" altLang="zh-TW" b="1" dirty="0">
@@ -31434,83 +31181,6 @@
   <p:cSld>
     <p:spTree>
       <p:nvGrpSpPr>
-        <p:cNvPr id="1" name="Shape 793">
-          <a:extLst>
-            <a:ext uri="{FF2B5EF4-FFF2-40B4-BE49-F238E27FC236}">
-              <a16:creationId xmlns:a16="http://schemas.microsoft.com/office/drawing/2014/main" id="{A5DDAAC3-597C-D175-3779-12D12F5F388D}"/>
-            </a:ext>
-          </a:extLst>
-        </p:cNvPr>
-        <p:cNvGrpSpPr/>
-        <p:nvPr/>
-      </p:nvGrpSpPr>
-      <p:grpSpPr>
-        <a:xfrm>
-          <a:off x="0" y="0"/>
-          <a:ext cx="0" cy="0"/>
-          <a:chOff x="0" y="0"/>
-          <a:chExt cx="0" cy="0"/>
-        </a:xfrm>
-      </p:grpSpPr>
-      <p:pic>
-        <p:nvPicPr>
-          <p:cNvPr id="12290" name="Picture 2" descr="已上傳的圖像"/>
-          <p:cNvPicPr>
-            <a:picLocks noChangeAspect="1" noChangeArrowheads="1"/>
-          </p:cNvPicPr>
-          <p:nvPr/>
-        </p:nvPicPr>
-        <p:blipFill>
-          <a:blip r:embed="rId3">
-            <a:extLst>
-              <a:ext uri="{28A0092B-C50C-407E-A947-70E740481C1C}">
-                <a14:useLocalDpi xmlns:a14="http://schemas.microsoft.com/office/drawing/2010/main" val="0"/>
-              </a:ext>
-            </a:extLst>
-          </a:blip>
-          <a:srcRect/>
-          <a:stretch>
-            <a:fillRect/>
-          </a:stretch>
-        </p:blipFill>
-        <p:spPr bwMode="auto">
-          <a:xfrm>
-            <a:off x="774699" y="191074"/>
-            <a:ext cx="7572375" cy="4852413"/>
-          </a:xfrm>
-          <a:prstGeom prst="rect">
-            <a:avLst/>
-          </a:prstGeom>
-          <a:noFill/>
-          <a:extLst>
-            <a:ext uri="{909E8E84-426E-40DD-AFC4-6F175D3DCCD1}">
-              <a14:hiddenFill xmlns:a14="http://schemas.microsoft.com/office/drawing/2010/main">
-                <a:solidFill>
-                  <a:srgbClr val="FFFFFF"/>
-                </a:solidFill>
-              </a14:hiddenFill>
-            </a:ext>
-          </a:extLst>
-        </p:spPr>
-      </p:pic>
-    </p:spTree>
-    <p:extLst>
-      <p:ext uri="{BB962C8B-B14F-4D97-AF65-F5344CB8AC3E}">
-        <p14:creationId xmlns:p14="http://schemas.microsoft.com/office/powerpoint/2010/main" val="3673659045"/>
-      </p:ext>
-    </p:extLst>
-  </p:cSld>
-  <p:clrMapOvr>
-    <a:masterClrMapping/>
-  </p:clrMapOvr>
-</p:sld>
-</file>
-
-<file path=ppt/slides/slide21.xml><?xml version="1.0" encoding="utf-8"?>
-<p:sld xmlns:a="http://schemas.openxmlformats.org/drawingml/2006/main" xmlns:r="http://schemas.openxmlformats.org/officeDocument/2006/relationships" xmlns:p="http://schemas.openxmlformats.org/presentationml/2006/main">
-  <p:cSld>
-    <p:spTree>
-      <p:nvGrpSpPr>
         <p:cNvPr id="1" name="Shape 732">
           <a:extLst>
             <a:ext uri="{FF2B5EF4-FFF2-40B4-BE49-F238E27FC236}">
@@ -31619,19 +31289,6 @@
                 <a:ea typeface="Microsoft JhengHei" panose="020B0604030504040204" pitchFamily="34" charset="-120"/>
               </a:rPr>
               <a:t>案例洞見</a:t>
-            </a:r>
-            <a:r>
-              <a:rPr lang="zh-TW" altLang="en-US" b="1" dirty="0">
-                <a:solidFill>
-                  <a:schemeClr val="accent1"/>
-                </a:solidFill>
-                <a:uFill>
-                  <a:noFill/>
-                </a:uFill>
-                <a:latin typeface="Microsoft JhengHei" panose="020B0604030504040204" pitchFamily="34" charset="-120"/>
-                <a:ea typeface="Microsoft JhengHei" panose="020B0604030504040204" pitchFamily="34" charset="-120"/>
-              </a:rPr>
-              <a:t/>
             </a:r>
             <a:br>
               <a:rPr lang="zh-TW" altLang="en-US" b="1" dirty="0">
@@ -32938,7 +32595,7 @@
 </p:sld>
 </file>
 
-<file path=ppt/slides/slide22.xml><?xml version="1.0" encoding="utf-8"?>
+<file path=ppt/slides/slide21.xml><?xml version="1.0" encoding="utf-8"?>
 <p:sld xmlns:a="http://schemas.openxmlformats.org/drawingml/2006/main" xmlns:r="http://schemas.openxmlformats.org/officeDocument/2006/relationships" xmlns:p="http://schemas.openxmlformats.org/presentationml/2006/main" show="0">
   <p:cSld>
     <p:spTree>
@@ -32980,7 +32637,7 @@
           <a:p>
             <a:pPr lvl="0" algn="ctr"/>
             <a:r>
-              <a:rPr lang="en-US" altLang="zh-TW" b="0" i="0" dirty="0" smtClean="0">
+              <a:rPr lang="en-US" altLang="zh-TW" b="0" i="0" dirty="0">
                 <a:ln>
                   <a:noFill/>
                 </a:ln>
@@ -33060,7 +32717,7 @@
               <a:buNone/>
             </a:pPr>
             <a:r>
-              <a:rPr lang="en" sz="9600" dirty="0" smtClean="0">
+              <a:rPr lang="en" sz="9600" dirty="0">
                 <a:solidFill>
                   <a:schemeClr val="dk2"/>
                 </a:solidFill>
@@ -33342,7 +32999,7 @@
                 <a:hlinkClick r:id="rId4" action="ppaction://hlinksldjump">
                   <a:extLst>
                     <a:ext uri="{A12FA001-AC4F-418D-AE19-62706E023703}">
-                      <ahyp:hlinkClr xmlns:ahyp="http://schemas.microsoft.com/office/drawing/2018/hyperlinkcolor" xmlns="" val="tx"/>
+                      <ahyp:hlinkClr xmlns:ahyp="http://schemas.microsoft.com/office/drawing/2018/hyperlinkcolor" val="tx"/>
                     </a:ext>
                   </a:extLst>
                 </a:hlinkClick>
@@ -33758,18 +33415,10 @@
   <p:clrMapOvr>
     <a:masterClrMapping/>
   </p:clrMapOvr>
-  <mc:AlternateContent xmlns:mc="http://schemas.openxmlformats.org/markup-compatibility/2006">
-    <mc:Choice xmlns:p14="http://schemas.microsoft.com/office/powerpoint/2010/main" Requires="p14">
-      <p:transition spd="slow" p14:dur="2000"/>
-    </mc:Choice>
-    <mc:Fallback>
-      <p:transition spd="slow"/>
-    </mc:Fallback>
-  </mc:AlternateContent>
 </p:sld>
 </file>
 
-<file path=ppt/slides/slide23.xml><?xml version="1.0" encoding="utf-8"?>
+<file path=ppt/slides/slide22.xml><?xml version="1.0" encoding="utf-8"?>
 <p:sld xmlns:a="http://schemas.openxmlformats.org/drawingml/2006/main" xmlns:r="http://schemas.openxmlformats.org/officeDocument/2006/relationships" xmlns:p="http://schemas.openxmlformats.org/presentationml/2006/main">
   <p:cSld>
     <p:spTree>
@@ -33863,13 +33512,6 @@
                 <a:ea typeface="Microsoft JhengHei" panose="020B0604030504040204" pitchFamily="34" charset="-120"/>
               </a:rPr>
               <a:t>成效評估 </a:t>
-            </a:r>
-            <a:r>
-              <a:rPr lang="en-US" altLang="zh-TW" b="1" dirty="0">
-                <a:latin typeface="Microsoft JhengHei" panose="020B0604030504040204" pitchFamily="34" charset="-120"/>
-                <a:ea typeface="Microsoft JhengHei" panose="020B0604030504040204" pitchFamily="34" charset="-120"/>
-              </a:rPr>
-              <a:t/>
             </a:r>
             <a:br>
               <a:rPr lang="en-US" altLang="zh-TW" b="1" dirty="0">
@@ -35184,7 +34826,7 @@
 </p:sld>
 </file>
 
-<file path=ppt/slides/slide24.xml><?xml version="1.0" encoding="utf-8"?>
+<file path=ppt/slides/slide23.xml><?xml version="1.0" encoding="utf-8"?>
 <p:sld xmlns:a="http://schemas.openxmlformats.org/drawingml/2006/main" xmlns:r="http://schemas.openxmlformats.org/officeDocument/2006/relationships" xmlns:p="http://schemas.openxmlformats.org/presentationml/2006/main">
   <p:cSld>
     <p:spTree>
@@ -35490,30 +35132,12 @@
               <a:buChar char="•"/>
             </a:pPr>
             <a:r>
-              <a:rPr lang="zh-TW" altLang="en-US" sz="2800" b="1" dirty="0" smtClean="0">
-                <a:latin typeface="微軟正黑體" panose="020B0604030504040204" pitchFamily="34" charset="-120"/>
-                <a:ea typeface="微軟正黑體" panose="020B0604030504040204" pitchFamily="34" charset="-120"/>
-              </a:rPr>
-              <a:t>Lead</a:t>
-            </a:r>
-            <a:r>
               <a:rPr lang="zh-TW" altLang="en-US" sz="2800" b="1" dirty="0">
                 <a:latin typeface="微軟正黑體" panose="020B0604030504040204" pitchFamily="34" charset="-120"/>
                 <a:ea typeface="微軟正黑體" panose="020B0604030504040204" pitchFamily="34" charset="-120"/>
               </a:rPr>
-              <a:t>-Lag：情緒指標領先價格 4–6 h (max 12 h</a:t>
+              <a:t>Lead-Lag：情緒指標領先價格 4–6 h (max 12 h)</a:t>
             </a:r>
-            <a:r>
-              <a:rPr lang="zh-TW" altLang="en-US" sz="2800" b="1" dirty="0" smtClean="0">
-                <a:latin typeface="微軟正黑體" panose="020B0604030504040204" pitchFamily="34" charset="-120"/>
-                <a:ea typeface="微軟正黑體" panose="020B0604030504040204" pitchFamily="34" charset="-120"/>
-              </a:rPr>
-              <a:t>)</a:t>
-            </a:r>
-            <a:endParaRPr lang="zh-TW" altLang="en-US" sz="2800" b="1" dirty="0">
-              <a:latin typeface="微軟正黑體" panose="020B0604030504040204" pitchFamily="34" charset="-120"/>
-              <a:ea typeface="微軟正黑體" panose="020B0604030504040204" pitchFamily="34" charset="-120"/>
-            </a:endParaRPr>
           </a:p>
         </p:txBody>
       </p:sp>
@@ -35754,7 +35378,7 @@
 </p:sld>
 </file>
 
-<file path=ppt/slides/slide25.xml><?xml version="1.0" encoding="utf-8"?>
+<file path=ppt/slides/slide24.xml><?xml version="1.0" encoding="utf-8"?>
 <p:sld xmlns:a="http://schemas.openxmlformats.org/drawingml/2006/main" xmlns:r="http://schemas.openxmlformats.org/officeDocument/2006/relationships" xmlns:p="http://schemas.openxmlformats.org/presentationml/2006/main">
   <p:cSld>
     <p:spTree>
@@ -35848,13 +35472,6 @@
                 <a:ea typeface="Microsoft JhengHei" panose="020B0604030504040204" pitchFamily="34" charset="-120"/>
               </a:rPr>
               <a:t>總結</a:t>
-            </a:r>
-            <a:r>
-              <a:rPr lang="en-US" b="1" dirty="0">
-                <a:latin typeface="Microsoft JhengHei" panose="020B0604030504040204" pitchFamily="34" charset="-120"/>
-                <a:ea typeface="Microsoft JhengHei" panose="020B0604030504040204" pitchFamily="34" charset="-120"/>
-              </a:rPr>
-              <a:t/>
             </a:r>
             <a:br>
               <a:rPr lang="en-US" b="1" dirty="0">
@@ -37162,7 +36779,7 @@
 </p:sld>
 </file>
 
-<file path=ppt/slides/slide26.xml><?xml version="1.0" encoding="utf-8"?>
+<file path=ppt/slides/slide25.xml><?xml version="1.0" encoding="utf-8"?>
 <p:sld xmlns:a="http://schemas.openxmlformats.org/drawingml/2006/main" xmlns:r="http://schemas.openxmlformats.org/officeDocument/2006/relationships" xmlns:p="http://schemas.openxmlformats.org/presentationml/2006/main">
   <p:cSld>
     <p:spTree>
@@ -37314,18 +36931,11 @@
           <a:lstStyle/>
           <a:p>
             <a:r>
-              <a:rPr lang="zh-TW" altLang="en-US" sz="2800" b="1" dirty="0" smtClean="0">
-                <a:latin typeface="微軟正黑體" panose="020B0604030504040204" pitchFamily="34" charset="-120"/>
-                <a:ea typeface="微軟正黑體" panose="020B0604030504040204" pitchFamily="34" charset="-120"/>
-              </a:rPr>
-              <a:t>整合</a:t>
-            </a:r>
-            <a:r>
               <a:rPr lang="zh-TW" altLang="en-US" sz="2800" b="1" dirty="0">
                 <a:latin typeface="微軟正黑體" panose="020B0604030504040204" pitchFamily="34" charset="-120"/>
                 <a:ea typeface="微軟正黑體" panose="020B0604030504040204" pitchFamily="34" charset="-120"/>
               </a:rPr>
-              <a:t>海量推文 → 互動儀表板 &amp; 領先指標</a:t>
+              <a:t>整合海量推文 → 互動儀表板 &amp; 領先指標</a:t>
             </a:r>
           </a:p>
           <a:p>
@@ -37336,30 +36946,12 @@
           </a:p>
           <a:p>
             <a:r>
-              <a:rPr lang="zh-TW" altLang="en-US" sz="2800" b="1" dirty="0" smtClean="0">
-                <a:latin typeface="微軟正黑體" panose="020B0604030504040204" pitchFamily="34" charset="-120"/>
-                <a:ea typeface="微軟正黑體" panose="020B0604030504040204" pitchFamily="34" charset="-120"/>
-              </a:rPr>
-              <a:t>驗證</a:t>
-            </a:r>
-            <a:r>
               <a:rPr lang="zh-TW" altLang="en-US" sz="2800" b="1" dirty="0">
                 <a:latin typeface="微軟正黑體" panose="020B0604030504040204" pitchFamily="34" charset="-120"/>
                 <a:ea typeface="微軟正黑體" panose="020B0604030504040204" pitchFamily="34" charset="-120"/>
               </a:rPr>
-              <a:t>：模型 + </a:t>
+              <a:t>驗證：模型 + 案例</a:t>
             </a:r>
-            <a:r>
-              <a:rPr lang="zh-TW" altLang="en-US" sz="2800" b="1" dirty="0" smtClean="0">
-                <a:latin typeface="微軟正黑體" panose="020B0604030504040204" pitchFamily="34" charset="-120"/>
-                <a:ea typeface="微軟正黑體" panose="020B0604030504040204" pitchFamily="34" charset="-120"/>
-              </a:rPr>
-              <a:t>案例</a:t>
-            </a:r>
-            <a:endParaRPr lang="zh-TW" altLang="en-US" sz="2800" b="1" dirty="0">
-              <a:latin typeface="微軟正黑體" panose="020B0604030504040204" pitchFamily="34" charset="-120"/>
-              <a:ea typeface="微軟正黑體" panose="020B0604030504040204" pitchFamily="34" charset="-120"/>
-            </a:endParaRPr>
           </a:p>
         </p:txBody>
       </p:sp>
@@ -37577,7 +37169,7 @@
 </p:sld>
 </file>
 
-<file path=ppt/slides/slide27.xml><?xml version="1.0" encoding="utf-8"?>
+<file path=ppt/slides/slide26.xml><?xml version="1.0" encoding="utf-8"?>
 <p:sld xmlns:a="http://schemas.openxmlformats.org/drawingml/2006/main" xmlns:r="http://schemas.openxmlformats.org/officeDocument/2006/relationships" xmlns:p="http://schemas.openxmlformats.org/presentationml/2006/main">
   <p:cSld>
     <p:spTree>
@@ -40444,7 +40036,7 @@
               </a:lnSpc>
             </a:pPr>
             <a:r>
-              <a:rPr lang="zh-TW" altLang="en-US" sz="3600" b="1" dirty="0" smtClean="0">
+              <a:rPr lang="zh-TW" altLang="en-US" sz="3600" b="1" dirty="0">
                 <a:solidFill>
                   <a:schemeClr val="tx1">
                     <a:lumMod val="75000"/>
@@ -42384,37 +41976,29 @@
                   <a:schemeClr val="accent1"/>
                 </a:solidFill>
               </a:rPr>
-              <a:t>▸ 價格</a:t>
+              <a:t>▸ 價格：</a:t>
             </a:r>
             <a:r>
-              <a:rPr lang="zh-TW" altLang="en-US" b="1" dirty="0" smtClean="0">
-                <a:solidFill>
-                  <a:schemeClr val="accent1"/>
-                </a:solidFill>
-              </a:rPr>
-              <a:t>：</a:t>
-            </a:r>
-            <a:r>
-              <a:rPr lang="en-US" altLang="zh-TW" dirty="0" smtClean="0"/>
+              <a:rPr lang="en-US" altLang="zh-TW" dirty="0"/>
               <a:t>Yahoo </a:t>
             </a:r>
             <a:r>
-              <a:rPr lang="en-US" altLang="zh-TW" dirty="0" err="1" smtClean="0"/>
+              <a:rPr lang="en-US" altLang="zh-TW" dirty="0" err="1"/>
               <a:t>Finace</a:t>
             </a:r>
             <a:r>
-              <a:rPr lang="en-US" altLang="zh-TW" dirty="0" smtClean="0"/>
+              <a:rPr lang="en-US" altLang="zh-TW" dirty="0"/>
               <a:t>(</a:t>
             </a:r>
             <a:r>
-              <a:rPr lang="en-US" altLang="zh-TW" dirty="0" err="1" smtClean="0"/>
+              <a:rPr lang="en-US" altLang="zh-TW" dirty="0" err="1"/>
               <a:t>yFinance</a:t>
             </a:r>
             <a:r>
-              <a:rPr lang="en-US" altLang="zh-TW" dirty="0" smtClean="0"/>
+              <a:rPr lang="en-US" altLang="zh-TW" dirty="0"/>
               <a:t>)</a:t>
             </a:r>
-            <a:endParaRPr lang="zh-TW" altLang="en-US" dirty="0" smtClean="0"/>
+            <a:endParaRPr lang="zh-TW" altLang="en-US" dirty="0"/>
           </a:p>
           <a:p>
             <a:pPr>
@@ -42423,7 +42007,7 @@
               </a:lnSpc>
             </a:pPr>
             <a:r>
-              <a:rPr lang="zh-TW" altLang="en-US" b="1" dirty="0" smtClean="0">
+              <a:rPr lang="zh-TW" altLang="en-US" b="1" dirty="0">
                 <a:solidFill>
                   <a:schemeClr val="accent1"/>
                 </a:solidFill>
@@ -42431,11 +42015,11 @@
               <a:t>▸ 推文：</a:t>
             </a:r>
             <a:r>
-              <a:rPr lang="zh-TW" altLang="en-US" dirty="0" smtClean="0"/>
+              <a:rPr lang="zh-TW" altLang="en-US" dirty="0"/>
               <a:t>Apify </a:t>
             </a:r>
             <a:r>
-              <a:rPr lang="en-US" altLang="zh-TW" dirty="0" smtClean="0">
+              <a:rPr lang="en-US" altLang="zh-TW" dirty="0">
                 <a:solidFill>
                   <a:srgbClr val="FF0000"/>
                 </a:solidFill>
@@ -42443,7 +42027,7 @@
               <a:t>(</a:t>
             </a:r>
             <a:r>
-              <a:rPr lang="zh-TW" altLang="en-US" dirty="0" smtClean="0">
+              <a:rPr lang="zh-TW" altLang="en-US" dirty="0">
                 <a:solidFill>
                   <a:srgbClr val="FF0000"/>
                 </a:solidFill>
@@ -42458,20 +42042,12 @@
               </a:lnSpc>
             </a:pPr>
             <a:r>
-              <a:rPr lang="zh-TW" altLang="en-US" b="1" dirty="0" smtClean="0">
-                <a:solidFill>
-                  <a:schemeClr val="accent1"/>
-                </a:solidFill>
-              </a:rPr>
-              <a:t>▸ </a:t>
-            </a:r>
-            <a:r>
               <a:rPr lang="zh-TW" altLang="en-US" b="1" dirty="0">
                 <a:solidFill>
                   <a:schemeClr val="accent1"/>
                 </a:solidFill>
               </a:rPr>
-              <a:t>篩選條件：</a:t>
+              <a:t>▸ 篩選條件：</a:t>
             </a:r>
             <a:endParaRPr lang="zh-TW" altLang="en-US" dirty="0"/>
           </a:p>
